--- a/outputs/traffic_sign_shape_classification_presentation.pptx
+++ b/outputs/traffic_sign_shape_classification_presentation.pptx
@@ -2,21 +2,22 @@
 <file path=ppt/presentation.xml><?xml version="1.0" encoding="utf-8"?>
 <p:presentation xmlns:p="http://schemas.openxmlformats.org/presentationml/2006/main">
   <p:sldMasterIdLst>
-    <p:sldMasterId xmlns:r="http://schemas.openxmlformats.org/officeDocument/2006/relationships" id="2147483648" r:id="R6153a4c8786e4696"/>
+    <p:sldMasterId xmlns:r="http://schemas.openxmlformats.org/officeDocument/2006/relationships" id="2147483648" r:id="R231952e772d14c00"/>
   </p:sldMasterIdLst>
   <p:notesMasterIdLst>
-    <p:notesMasterId xmlns:r="http://schemas.openxmlformats.org/officeDocument/2006/relationships" r:id="Rb7c9381d92da4772"/>
+    <p:notesMasterId xmlns:r="http://schemas.openxmlformats.org/officeDocument/2006/relationships" r:id="Rc136a4d793a54470"/>
   </p:notesMasterIdLst>
   <p:sldIdLst>
-    <p:sldId xmlns:r="http://schemas.openxmlformats.org/officeDocument/2006/relationships" id="256" r:id="Rd15ffd9cbdac4f81"/>
-    <p:sldId xmlns:r="http://schemas.openxmlformats.org/officeDocument/2006/relationships" id="257" r:id="Re5d8bc27cecb4570"/>
-    <p:sldId xmlns:r="http://schemas.openxmlformats.org/officeDocument/2006/relationships" id="258" r:id="Rd0d8af2194d54b8c"/>
-    <p:sldId xmlns:r="http://schemas.openxmlformats.org/officeDocument/2006/relationships" id="259" r:id="R7d01e7328fbc416c"/>
-    <p:sldId xmlns:r="http://schemas.openxmlformats.org/officeDocument/2006/relationships" id="260" r:id="Rfcff4a75020b4b6b"/>
-    <p:sldId xmlns:r="http://schemas.openxmlformats.org/officeDocument/2006/relationships" id="261" r:id="Re7febf1a88bf43e2"/>
-    <p:sldId xmlns:r="http://schemas.openxmlformats.org/officeDocument/2006/relationships" id="262" r:id="Rb3746d446d344040"/>
-    <p:sldId xmlns:r="http://schemas.openxmlformats.org/officeDocument/2006/relationships" id="263" r:id="R067e732114f74fbe"/>
-    <p:sldId xmlns:r="http://schemas.openxmlformats.org/officeDocument/2006/relationships" id="264" r:id="Rc32342ca8bfb4356"/>
+    <p:sldId xmlns:r="http://schemas.openxmlformats.org/officeDocument/2006/relationships" id="256" r:id="Re7d8d112913c4cb8"/>
+    <p:sldId xmlns:r="http://schemas.openxmlformats.org/officeDocument/2006/relationships" id="257" r:id="R902b2141ac6f447c"/>
+    <p:sldId xmlns:r="http://schemas.openxmlformats.org/officeDocument/2006/relationships" id="258" r:id="R34523fcdc6574f18"/>
+    <p:sldId xmlns:r="http://schemas.openxmlformats.org/officeDocument/2006/relationships" id="259" r:id="R3d942b454b2b4480"/>
+    <p:sldId xmlns:r="http://schemas.openxmlformats.org/officeDocument/2006/relationships" id="260" r:id="Rf91cc2b52c774a14"/>
+    <p:sldId xmlns:r="http://schemas.openxmlformats.org/officeDocument/2006/relationships" id="261" r:id="R93aee30174834958"/>
+    <p:sldId xmlns:r="http://schemas.openxmlformats.org/officeDocument/2006/relationships" id="262" r:id="R91d33a77da684f8b"/>
+    <p:sldId xmlns:r="http://schemas.openxmlformats.org/officeDocument/2006/relationships" id="263" r:id="Rd25cb1a343514cf7"/>
+    <p:sldId xmlns:r="http://schemas.openxmlformats.org/officeDocument/2006/relationships" id="264" r:id="R7b083ae59b224ce4"/>
+    <p:sldId xmlns:r="http://schemas.openxmlformats.org/officeDocument/2006/relationships" id="265" r:id="R9863d752db6942fe"/>
   </p:sldIdLst>
   <p:sldSz cx="12192000" cy="6858000"/>
   <p:notesSz cx="6858000" cy="9144000"/>
@@ -571,6 +572,72 @@
 </p:notes>
 </file>
 
+<file path=ppt/notesSlides/notesSlide10.xml><?xml version="1.0" encoding="utf-8"?>
+<p:notes xmlns:p="http://schemas.openxmlformats.org/presentationml/2006/main">
+  <p:cSld>
+    <p:spTree>
+      <p:nvGrpSpPr>
+        <p:cNvPr id="1" name=""/>
+        <p:cNvGrpSpPr/>
+        <p:nvPr/>
+      </p:nvGrpSpPr>
+      <p:grpSpPr>
+        <a:xfrm xmlns:a="http://schemas.openxmlformats.org/drawingml/2006/main"/>
+      </p:grpSpPr>
+      <p:sp>
+        <p:nvSpPr>
+          <p:cNvPr id="2" name="Slide Image Placeholder 1"/>
+          <p:cNvSpPr>
+            <a:spLocks xmlns:a="http://schemas.openxmlformats.org/drawingml/2006/main" noGrp="1"/>
+          </p:cNvSpPr>
+          <p:nvPr>
+            <p:ph type="sldImg" idx="0"/>
+          </p:nvPr>
+        </p:nvSpPr>
+        <p:spPr/>
+      </p:sp>
+      <p:sp>
+        <p:nvSpPr>
+          <p:cNvPr id="3" name="Notes Placeholder 2"/>
+          <p:cNvSpPr>
+            <a:spLocks xmlns:a="http://schemas.openxmlformats.org/drawingml/2006/main" noGrp="1"/>
+          </p:cNvSpPr>
+          <p:nvPr>
+            <p:ph type="body" idx="1"/>
+          </p:nvPr>
+        </p:nvSpPr>
+        <p:spPr/>
+        <p:txBody>
+          <a:bodyPr xmlns:a="http://schemas.openxmlformats.org/drawingml/2006/main"/>
+          <a:lstStyle xmlns:a="http://schemas.openxmlformats.org/drawingml/2006/main"/>
+          <a:p xmlns:a="http://schemas.openxmlformats.org/drawingml/2006/main"/>
+        </p:txBody>
+      </p:sp>
+      <p:sp>
+        <p:nvSpPr>
+          <p:cNvPr id="4" name="Slide Number Placeholder 3"/>
+          <p:cNvSpPr>
+            <a:spLocks xmlns:a="http://schemas.openxmlformats.org/drawingml/2006/main" noGrp="1"/>
+          </p:cNvSpPr>
+          <p:nvPr>
+            <p:ph type="sldNum" idx="5"/>
+          </p:nvPr>
+        </p:nvSpPr>
+        <p:spPr/>
+        <p:txBody>
+          <a:bodyPr xmlns:a="http://schemas.openxmlformats.org/drawingml/2006/main"/>
+          <a:lstStyle xmlns:a="http://schemas.openxmlformats.org/drawingml/2006/main"/>
+          <a:p xmlns:a="http://schemas.openxmlformats.org/drawingml/2006/main"/>
+        </p:txBody>
+      </p:sp>
+    </p:spTree>
+  </p:cSld>
+  <p:clrMapOvr>
+    <a:masterClrMapping xmlns:a="http://schemas.openxmlformats.org/drawingml/2006/main"/>
+  </p:clrMapOvr>
+</p:notes>
+</file>
+
 <file path=ppt/notesSlides/notesSlide2.xml><?xml version="1.0" encoding="utf-8"?>
 <p:notes xmlns:p="http://schemas.openxmlformats.org/presentationml/2006/main">
   <p:cSld>
@@ -1137,7 +1204,7 @@
   </p:cSld>
   <p:clrMap bg1="lt1" tx1="dk1" bg2="lt2" tx2="dk2" accent1="accent1" accent2="accent2" accent3="accent3" accent4="accent4" accent5="accent5" accent6="accent6" hlink="hlink" folHlink="folHlink"/>
   <p:sldLayoutIdLst>
-    <p:sldLayoutId xmlns:r="http://schemas.openxmlformats.org/officeDocument/2006/relationships" id="2147483649" r:id="R6565fdb9d8734105"/>
+    <p:sldLayoutId xmlns:r="http://schemas.openxmlformats.org/officeDocument/2006/relationships" id="2147483649" r:id="R795feeb789454cb3"/>
   </p:sldLayoutIdLst>
   <p:txStyles>
     <p:titleStyle>
@@ -1688,7 +1755,7 @@
           <p:cNvPr id="1" name="">
             <a:extLst xmlns:a="http://schemas.openxmlformats.org/drawingml/2006/main">
               <a:ext uri="{FF2B5EF4-FFF2-40B4-BE49-F238E27FC236}">
-                <a16:creationId xmlns:a16="http://schemas.microsoft.com/office/drawing/2014/main" id="{F3F04095-B594-43DC-A0B9-8890A9EDF10C}"/>
+                <a16:creationId xmlns:a16="http://schemas.microsoft.com/office/drawing/2014/main" id="{D0B82801-0B79-4462-8938-E1D3C3966BA3}"/>
               </a:ext>
             </a:extLst>
           </p:cNvPr>
@@ -1721,7 +1788,7 @@
           <p:cNvPr id="2" name="">
             <a:extLst xmlns:a="http://schemas.openxmlformats.org/drawingml/2006/main">
               <a:ext uri="{FF2B5EF4-FFF2-40B4-BE49-F238E27FC236}">
-                <a16:creationId xmlns:a16="http://schemas.microsoft.com/office/drawing/2014/main" id="{40A6DA0D-2749-4579-8754-E9FB14751E90}"/>
+                <a16:creationId xmlns:a16="http://schemas.microsoft.com/office/drawing/2014/main" id="{B9773C17-29CE-47EB-BBA7-7159DF1C7927}"/>
               </a:ext>
             </a:extLst>
           </p:cNvPr>
@@ -1800,7 +1867,7 @@
           <p:cNvPr id="3" name="">
             <a:extLst xmlns:a="http://schemas.openxmlformats.org/drawingml/2006/main">
               <a:ext uri="{FF2B5EF4-FFF2-40B4-BE49-F238E27FC236}">
-                <a16:creationId xmlns:a16="http://schemas.microsoft.com/office/drawing/2014/main" id="{6F0C9102-5518-4191-9080-FD83206ECB38}"/>
+                <a16:creationId xmlns:a16="http://schemas.microsoft.com/office/drawing/2014/main" id="{96ACA3E1-6BAF-4F6E-BF26-93ADDE880D46}"/>
               </a:ext>
             </a:extLst>
           </p:cNvPr>
@@ -1856,7 +1923,7 @@
           <p:cNvPr id="4" name="">
             <a:extLst xmlns:a="http://schemas.openxmlformats.org/drawingml/2006/main">
               <a:ext uri="{FF2B5EF4-FFF2-40B4-BE49-F238E27FC236}">
-                <a16:creationId xmlns:a16="http://schemas.microsoft.com/office/drawing/2014/main" id="{8672210B-E572-4CA6-804B-4E01FC229B46}"/>
+                <a16:creationId xmlns:a16="http://schemas.microsoft.com/office/drawing/2014/main" id="{5D57D92E-E9AA-405A-BFF1-CD3C3C41C965}"/>
               </a:ext>
             </a:extLst>
           </p:cNvPr>
@@ -1912,7 +1979,7 @@
           <p:cNvPr id="5" name="">
             <a:extLst xmlns:a="http://schemas.openxmlformats.org/drawingml/2006/main">
               <a:ext uri="{FF2B5EF4-FFF2-40B4-BE49-F238E27FC236}">
-                <a16:creationId xmlns:a16="http://schemas.microsoft.com/office/drawing/2014/main" id="{70D087ED-7830-4C76-9120-0E259457C536}"/>
+                <a16:creationId xmlns:a16="http://schemas.microsoft.com/office/drawing/2014/main" id="{EF4B1D83-2E41-4D31-A96C-479F945D5F0C}"/>
               </a:ext>
             </a:extLst>
           </p:cNvPr>
@@ -1945,7 +2012,7 @@
           <p:cNvPr id="6" name="">
             <a:extLst xmlns:a="http://schemas.openxmlformats.org/drawingml/2006/main">
               <a:ext uri="{FF2B5EF4-FFF2-40B4-BE49-F238E27FC236}">
-                <a16:creationId xmlns:a16="http://schemas.microsoft.com/office/drawing/2014/main" id="{BBF29EC0-9BB9-4AF7-B684-A39B615920DE}"/>
+                <a16:creationId xmlns:a16="http://schemas.microsoft.com/office/drawing/2014/main" id="{8E74F558-A5A9-43ED-86DB-7E34AC64669C}"/>
               </a:ext>
             </a:extLst>
           </p:cNvPr>
@@ -2001,7 +2068,7 @@
           <p:cNvPr id="7" name="">
             <a:extLst xmlns:a="http://schemas.openxmlformats.org/drawingml/2006/main">
               <a:ext uri="{FF2B5EF4-FFF2-40B4-BE49-F238E27FC236}">
-                <a16:creationId xmlns:a16="http://schemas.microsoft.com/office/drawing/2014/main" id="{67D667E1-E76D-4E09-9918-61647200AE3A}"/>
+                <a16:creationId xmlns:a16="http://schemas.microsoft.com/office/drawing/2014/main" id="{52E5DA86-A5B5-46A1-B8B0-1CC0DFCAAB86}"/>
               </a:ext>
             </a:extLst>
           </p:cNvPr>
@@ -2034,7 +2101,7 @@
           <p:cNvPr id="8" name="">
             <a:extLst xmlns:a="http://schemas.openxmlformats.org/drawingml/2006/main">
               <a:ext uri="{FF2B5EF4-FFF2-40B4-BE49-F238E27FC236}">
-                <a16:creationId xmlns:a16="http://schemas.microsoft.com/office/drawing/2014/main" id="{E1A1D172-2044-4807-BF77-8C9B6B17816B}"/>
+                <a16:creationId xmlns:a16="http://schemas.microsoft.com/office/drawing/2014/main" id="{02557BFB-061A-47A7-8AF7-BE0648A1266E}"/>
               </a:ext>
             </a:extLst>
           </p:cNvPr>
@@ -2090,7 +2157,7 @@
           <p:cNvPr id="9" name="">
             <a:extLst xmlns:a="http://schemas.openxmlformats.org/drawingml/2006/main">
               <a:ext uri="{FF2B5EF4-FFF2-40B4-BE49-F238E27FC236}">
-                <a16:creationId xmlns:a16="http://schemas.microsoft.com/office/drawing/2014/main" id="{3A9D1A52-C091-4CC2-B85F-33A7F9CBC60C}"/>
+                <a16:creationId xmlns:a16="http://schemas.microsoft.com/office/drawing/2014/main" id="{73A4CAEA-232D-46AA-A469-9126E3873023}"/>
               </a:ext>
             </a:extLst>
           </p:cNvPr>
@@ -2123,7 +2190,7 @@
           <p:cNvPr id="10" name="">
             <a:extLst xmlns:a="http://schemas.openxmlformats.org/drawingml/2006/main">
               <a:ext uri="{FF2B5EF4-FFF2-40B4-BE49-F238E27FC236}">
-                <a16:creationId xmlns:a16="http://schemas.microsoft.com/office/drawing/2014/main" id="{1715DFAC-4791-46D9-ABE7-D0971FED18B6}"/>
+                <a16:creationId xmlns:a16="http://schemas.microsoft.com/office/drawing/2014/main" id="{2B5EF0FB-8DD1-4073-A683-0F70F9A28B32}"/>
               </a:ext>
             </a:extLst>
           </p:cNvPr>
@@ -2179,7 +2246,7 @@
           <p:cNvPr id="11" name="">
             <a:extLst xmlns:a="http://schemas.openxmlformats.org/drawingml/2006/main">
               <a:ext uri="{FF2B5EF4-FFF2-40B4-BE49-F238E27FC236}">
-                <a16:creationId xmlns:a16="http://schemas.microsoft.com/office/drawing/2014/main" id="{F5444992-6B65-4674-8994-8D4B1CF4B6DF}"/>
+                <a16:creationId xmlns:a16="http://schemas.microsoft.com/office/drawing/2014/main" id="{3ADCF498-35B3-4EEA-AEE4-E78D068CE27A}"/>
               </a:ext>
             </a:extLst>
           </p:cNvPr>
@@ -2235,7 +2302,7 @@
           <p:cNvPr id="12" name="">
             <a:extLst xmlns:a="http://schemas.openxmlformats.org/drawingml/2006/main">
               <a:ext uri="{FF2B5EF4-FFF2-40B4-BE49-F238E27FC236}">
-                <a16:creationId xmlns:a16="http://schemas.microsoft.com/office/drawing/2014/main" id="{5640DCCD-A332-40A6-AB43-BC0A4BBB3CD5}"/>
+                <a16:creationId xmlns:a16="http://schemas.microsoft.com/office/drawing/2014/main" id="{10722001-4AAE-444F-B141-852CBA1F8727}"/>
               </a:ext>
             </a:extLst>
           </p:cNvPr>
@@ -2289,7 +2356,1295 @@
     </p:spTree>
     <p:extLst>
       <p:ext uri="{BB962C8B-B14F-4D97-AF65-F5344CB8AC3E}">
-        <p14:creationId xmlns:p14="http://schemas.microsoft.com/office/powerpoint/2010/main" val="1173160891"/>
+        <p14:creationId xmlns:p14="http://schemas.microsoft.com/office/powerpoint/2010/main" val="963343442"/>
+      </p:ext>
+    </p:extLst>
+  </p:cSld>
+</p:sld>
+</file>
+
+<file path=ppt/slides/slide10.xml><?xml version="1.0" encoding="utf-8"?>
+<p:sld xmlns:p="http://schemas.openxmlformats.org/presentationml/2006/main">
+  <p:cSld>
+    <p:bg>
+      <p:bgPr>
+        <a:solidFill xmlns:a="http://schemas.openxmlformats.org/drawingml/2006/main">
+          <a:srgbClr val="F8FAFC"/>
+        </a:solidFill>
+      </p:bgPr>
+    </p:bg>
+    <p:spTree>
+      <p:nvGrpSpPr>
+        <p:cNvPr id="1" name=""/>
+        <p:cNvGrpSpPr/>
+        <p:nvPr/>
+      </p:nvGrpSpPr>
+      <p:grpSpPr>
+        <a:xfrm xmlns:a="http://schemas.openxmlformats.org/drawingml/2006/main"/>
+      </p:grpSpPr>
+      <p:sp>
+        <p:nvSpPr>
+          <p:cNvPr id="1" name="">
+            <a:extLst xmlns:a="http://schemas.openxmlformats.org/drawingml/2006/main">
+              <a:ext uri="{FF2B5EF4-FFF2-40B4-BE49-F238E27FC236}">
+                <a16:creationId xmlns:a16="http://schemas.microsoft.com/office/drawing/2014/main" id="{8179E6A4-BEC1-4086-A814-7615CB473E02}"/>
+              </a:ext>
+            </a:extLst>
+          </p:cNvPr>
+          <p:cNvSpPr>
+            <a:spLocks xmlns:a="http://schemas.openxmlformats.org/drawingml/2006/main" noGrp="1"/>
+          </p:cNvSpPr>
+          <p:nvPr/>
+        </p:nvSpPr>
+        <p:spPr>
+          <a:xfrm xmlns:a="http://schemas.openxmlformats.org/drawingml/2006/main">
+            <a:off x="609600" y="457200"/>
+            <a:ext cx="7810500" cy="495300"/>
+          </a:xfrm>
+          <a:prstGeom xmlns:a="http://schemas.openxmlformats.org/drawingml/2006/main" prst="rect">
+            <a:avLst/>
+          </a:prstGeom>
+          <a:noFill xmlns:a="http://schemas.openxmlformats.org/drawingml/2006/main"/>
+          <a:ln xmlns:a="http://schemas.openxmlformats.org/drawingml/2006/main" w="0">
+            <a:noFill/>
+            <a:prstDash val="solid"/>
+          </a:ln>
+        </p:spPr>
+        <p:txBody>
+          <a:bodyPr xmlns:a="http://schemas.openxmlformats.org/drawingml/2006/main"/>
+          <a:lstStyle xmlns:a="http://schemas.openxmlformats.org/drawingml/2006/main"/>
+          <a:p xmlns:a="http://schemas.openxmlformats.org/drawingml/2006/main">
+            <a:pPr>
+              <a:defRPr sz="2550" b="1">
+                <a:solidFill>
+                  <a:srgbClr val="111827"/>
+                </a:solidFill>
+                <a:latin typeface="Malgun Gothic"/>
+                <a:ea typeface="Malgun Gothic"/>
+                <a:cs typeface="Malgun Gothic"/>
+              </a:defRPr>
+            </a:pPr>
+            <a:r>
+              <a:rPr sz="2550" b="1">
+                <a:solidFill>
+                  <a:srgbClr val="111827"/>
+                </a:solidFill>
+                <a:latin typeface="Malgun Gothic"/>
+                <a:ea typeface="Malgun Gothic"/>
+                <a:cs typeface="Malgun Gothic"/>
+              </a:rPr>
+              <a:t>AI 도구 사용 내역</a:t>
+            </a:r>
+          </a:p>
+        </p:txBody>
+      </p:sp>
+      <p:sp>
+        <p:nvSpPr>
+          <p:cNvPr id="2" name="">
+            <a:extLst xmlns:a="http://schemas.openxmlformats.org/drawingml/2006/main">
+              <a:ext uri="{FF2B5EF4-FFF2-40B4-BE49-F238E27FC236}">
+                <a16:creationId xmlns:a16="http://schemas.microsoft.com/office/drawing/2014/main" id="{20E3A8FC-8AB7-4023-9E61-1BC1A4E7E633}"/>
+              </a:ext>
+            </a:extLst>
+          </p:cNvPr>
+          <p:cNvSpPr>
+            <a:spLocks xmlns:a="http://schemas.openxmlformats.org/drawingml/2006/main" noGrp="1"/>
+          </p:cNvSpPr>
+          <p:nvPr/>
+        </p:nvSpPr>
+        <p:spPr>
+          <a:xfrm xmlns:a="http://schemas.openxmlformats.org/drawingml/2006/main">
+            <a:off x="609600" y="990600"/>
+            <a:ext cx="7810500" cy="285750"/>
+          </a:xfrm>
+          <a:prstGeom xmlns:a="http://schemas.openxmlformats.org/drawingml/2006/main" prst="rect">
+            <a:avLst/>
+          </a:prstGeom>
+          <a:noFill xmlns:a="http://schemas.openxmlformats.org/drawingml/2006/main"/>
+          <a:ln xmlns:a="http://schemas.openxmlformats.org/drawingml/2006/main" w="0">
+            <a:noFill/>
+            <a:prstDash val="solid"/>
+          </a:ln>
+        </p:spPr>
+        <p:txBody>
+          <a:bodyPr xmlns:a="http://schemas.openxmlformats.org/drawingml/2006/main"/>
+          <a:lstStyle xmlns:a="http://schemas.openxmlformats.org/drawingml/2006/main"/>
+          <a:p xmlns:a="http://schemas.openxmlformats.org/drawingml/2006/main">
+            <a:pPr>
+              <a:defRPr sz="1125" b="1">
+                <a:solidFill>
+                  <a:srgbClr val="475569"/>
+                </a:solidFill>
+                <a:latin typeface="Malgun Gothic"/>
+                <a:ea typeface="Malgun Gothic"/>
+                <a:cs typeface="Malgun Gothic"/>
+              </a:defRPr>
+            </a:pPr>
+            <a:r>
+              <a:rPr sz="1125" b="1">
+                <a:solidFill>
+                  <a:srgbClr val="475569"/>
+                </a:solidFill>
+                <a:latin typeface="Malgun Gothic"/>
+                <a:ea typeface="Malgun Gothic"/>
+                <a:cs typeface="Malgun Gothic"/>
+              </a:rPr>
+              <a:t>과제 공지사항 반영</a:t>
+            </a:r>
+          </a:p>
+        </p:txBody>
+      </p:sp>
+      <p:sp>
+        <p:nvSpPr>
+          <p:cNvPr id="3" name="">
+            <a:extLst xmlns:a="http://schemas.openxmlformats.org/drawingml/2006/main">
+              <a:ext uri="{FF2B5EF4-FFF2-40B4-BE49-F238E27FC236}">
+                <a16:creationId xmlns:a16="http://schemas.microsoft.com/office/drawing/2014/main" id="{165E73FF-FE33-48F7-8320-1659E7391991}"/>
+              </a:ext>
+            </a:extLst>
+          </p:cNvPr>
+          <p:cNvSpPr>
+            <a:spLocks xmlns:a="http://schemas.openxmlformats.org/drawingml/2006/main" noGrp="1"/>
+          </p:cNvSpPr>
+          <p:nvPr/>
+        </p:nvSpPr>
+        <p:spPr>
+          <a:xfrm xmlns:a="http://schemas.openxmlformats.org/drawingml/2006/main">
+            <a:off x="609600" y="1352550"/>
+            <a:ext cx="1238250" cy="47625"/>
+          </a:xfrm>
+          <a:prstGeom xmlns:a="http://schemas.openxmlformats.org/drawingml/2006/main" prst="rect">
+            <a:avLst/>
+          </a:prstGeom>
+          <a:solidFill xmlns:a="http://schemas.openxmlformats.org/drawingml/2006/main">
+            <a:srgbClr val="0F766E"/>
+          </a:solidFill>
+          <a:ln xmlns:a="http://schemas.openxmlformats.org/drawingml/2006/main" w="0">
+            <a:solidFill>
+              <a:srgbClr val="0F766E"/>
+            </a:solidFill>
+            <a:prstDash val="solid"/>
+          </a:ln>
+        </p:spPr>
+      </p:sp>
+      <p:sp>
+        <p:nvSpPr>
+          <p:cNvPr id="4" name="">
+            <a:extLst xmlns:a="http://schemas.openxmlformats.org/drawingml/2006/main">
+              <a:ext uri="{FF2B5EF4-FFF2-40B4-BE49-F238E27FC236}">
+                <a16:creationId xmlns:a16="http://schemas.microsoft.com/office/drawing/2014/main" id="{32448FB4-B540-4664-AAD4-6196BFF4E4FF}"/>
+              </a:ext>
+            </a:extLst>
+          </p:cNvPr>
+          <p:cNvSpPr>
+            <a:spLocks xmlns:a="http://schemas.openxmlformats.org/drawingml/2006/main" noGrp="1"/>
+          </p:cNvSpPr>
+          <p:nvPr/>
+        </p:nvSpPr>
+        <p:spPr>
+          <a:xfrm xmlns:a="http://schemas.openxmlformats.org/drawingml/2006/main">
+            <a:off x="800100" y="1695450"/>
+            <a:ext cx="9334500" cy="323850"/>
+          </a:xfrm>
+          <a:prstGeom xmlns:a="http://schemas.openxmlformats.org/drawingml/2006/main" prst="rect">
+            <a:avLst/>
+          </a:prstGeom>
+          <a:noFill xmlns:a="http://schemas.openxmlformats.org/drawingml/2006/main"/>
+          <a:ln xmlns:a="http://schemas.openxmlformats.org/drawingml/2006/main" w="0">
+            <a:noFill/>
+            <a:prstDash val="solid"/>
+          </a:ln>
+        </p:spPr>
+        <p:txBody>
+          <a:bodyPr xmlns:a="http://schemas.openxmlformats.org/drawingml/2006/main"/>
+          <a:lstStyle xmlns:a="http://schemas.openxmlformats.org/drawingml/2006/main"/>
+          <a:p xmlns:a="http://schemas.openxmlformats.org/drawingml/2006/main">
+            <a:pPr>
+              <a:defRPr sz="1725" b="1">
+                <a:solidFill>
+                  <a:srgbClr val="111827"/>
+                </a:solidFill>
+                <a:latin typeface="Malgun Gothic"/>
+                <a:ea typeface="Malgun Gothic"/>
+                <a:cs typeface="Malgun Gothic"/>
+              </a:defRPr>
+            </a:pPr>
+            <a:r>
+              <a:rPr sz="1725" b="1">
+                <a:solidFill>
+                  <a:srgbClr val="111827"/>
+                </a:solidFill>
+                <a:latin typeface="Malgun Gothic"/>
+                <a:ea typeface="Malgun Gothic"/>
+                <a:cs typeface="Malgun Gothic"/>
+              </a:rPr>
+              <a:t>본 프로젝트에서는 AI 도구를 다음과 같은 부분에 참고했습니다.</a:t>
+            </a:r>
+          </a:p>
+        </p:txBody>
+      </p:sp>
+      <p:sp>
+        <p:nvSpPr>
+          <p:cNvPr id="5" name="">
+            <a:extLst xmlns:a="http://schemas.openxmlformats.org/drawingml/2006/main">
+              <a:ext uri="{FF2B5EF4-FFF2-40B4-BE49-F238E27FC236}">
+                <a16:creationId xmlns:a16="http://schemas.microsoft.com/office/drawing/2014/main" id="{548C6DBF-7E31-464B-8030-6AE709B20612}"/>
+              </a:ext>
+            </a:extLst>
+          </p:cNvPr>
+          <p:cNvSpPr>
+            <a:spLocks xmlns:a="http://schemas.openxmlformats.org/drawingml/2006/main" noGrp="1"/>
+          </p:cNvSpPr>
+          <p:nvPr/>
+        </p:nvSpPr>
+        <p:spPr>
+          <a:xfrm xmlns:a="http://schemas.openxmlformats.org/drawingml/2006/main">
+            <a:off x="838200" y="2305050"/>
+            <a:ext cx="10287000" cy="495300"/>
+          </a:xfrm>
+          <a:prstGeom xmlns:a="http://schemas.openxmlformats.org/drawingml/2006/main" prst="roundRect">
+            <a:avLst>
+              <a:gd name="adj" fmla="val 15385"/>
+            </a:avLst>
+          </a:prstGeom>
+          <a:solidFill xmlns:a="http://schemas.openxmlformats.org/drawingml/2006/main">
+            <a:srgbClr val="FFFFFF"/>
+          </a:solidFill>
+          <a:ln xmlns:a="http://schemas.openxmlformats.org/drawingml/2006/main" w="9525">
+            <a:solidFill>
+              <a:srgbClr val="CBD5E1"/>
+            </a:solidFill>
+            <a:prstDash val="solid"/>
+          </a:ln>
+        </p:spPr>
+      </p:sp>
+      <p:sp>
+        <p:nvSpPr>
+          <p:cNvPr id="6" name="">
+            <a:extLst xmlns:a="http://schemas.openxmlformats.org/drawingml/2006/main">
+              <a:ext uri="{FF2B5EF4-FFF2-40B4-BE49-F238E27FC236}">
+                <a16:creationId xmlns:a16="http://schemas.microsoft.com/office/drawing/2014/main" id="{31277E4D-AB5B-4669-9D15-B54BE7D7D1A5}"/>
+              </a:ext>
+            </a:extLst>
+          </p:cNvPr>
+          <p:cNvSpPr>
+            <a:spLocks xmlns:a="http://schemas.openxmlformats.org/drawingml/2006/main" noGrp="1"/>
+          </p:cNvSpPr>
+          <p:nvPr/>
+        </p:nvSpPr>
+        <p:spPr>
+          <a:xfrm xmlns:a="http://schemas.openxmlformats.org/drawingml/2006/main">
+            <a:off x="1085850" y="2447925"/>
+            <a:ext cx="209550" cy="209550"/>
+          </a:xfrm>
+          <a:prstGeom xmlns:a="http://schemas.openxmlformats.org/drawingml/2006/main" prst="ellipse">
+            <a:avLst/>
+          </a:prstGeom>
+          <a:solidFill xmlns:a="http://schemas.openxmlformats.org/drawingml/2006/main">
+            <a:srgbClr val="0F766E"/>
+          </a:solidFill>
+          <a:ln xmlns:a="http://schemas.openxmlformats.org/drawingml/2006/main" w="0">
+            <a:noFill/>
+            <a:prstDash val="solid"/>
+          </a:ln>
+        </p:spPr>
+      </p:sp>
+      <p:sp>
+        <p:nvSpPr>
+          <p:cNvPr id="7" name="">
+            <a:extLst xmlns:a="http://schemas.openxmlformats.org/drawingml/2006/main">
+              <a:ext uri="{FF2B5EF4-FFF2-40B4-BE49-F238E27FC236}">
+                <a16:creationId xmlns:a16="http://schemas.microsoft.com/office/drawing/2014/main" id="{9068011D-B227-46DE-832B-2E6273360E2B}"/>
+              </a:ext>
+            </a:extLst>
+          </p:cNvPr>
+          <p:cNvSpPr>
+            <a:spLocks xmlns:a="http://schemas.openxmlformats.org/drawingml/2006/main" noGrp="1"/>
+          </p:cNvSpPr>
+          <p:nvPr/>
+        </p:nvSpPr>
+        <p:spPr>
+          <a:xfrm xmlns:a="http://schemas.openxmlformats.org/drawingml/2006/main">
+            <a:off x="1504950" y="2419350"/>
+            <a:ext cx="2381250" cy="266700"/>
+          </a:xfrm>
+          <a:prstGeom xmlns:a="http://schemas.openxmlformats.org/drawingml/2006/main" prst="rect">
+            <a:avLst/>
+          </a:prstGeom>
+          <a:noFill xmlns:a="http://schemas.openxmlformats.org/drawingml/2006/main"/>
+          <a:ln xmlns:a="http://schemas.openxmlformats.org/drawingml/2006/main" w="0">
+            <a:noFill/>
+            <a:prstDash val="solid"/>
+          </a:ln>
+        </p:spPr>
+        <p:txBody>
+          <a:bodyPr xmlns:a="http://schemas.openxmlformats.org/drawingml/2006/main"/>
+          <a:lstStyle xmlns:a="http://schemas.openxmlformats.org/drawingml/2006/main"/>
+          <a:p xmlns:a="http://schemas.openxmlformats.org/drawingml/2006/main">
+            <a:pPr>
+              <a:defRPr sz="1350" b="1">
+                <a:solidFill>
+                  <a:srgbClr val="111827"/>
+                </a:solidFill>
+                <a:latin typeface="Malgun Gothic"/>
+                <a:ea typeface="Malgun Gothic"/>
+                <a:cs typeface="Malgun Gothic"/>
+              </a:defRPr>
+            </a:pPr>
+            <a:r>
+              <a:rPr sz="1350" b="1">
+                <a:solidFill>
+                  <a:srgbClr val="111827"/>
+                </a:solidFill>
+                <a:latin typeface="Malgun Gothic"/>
+                <a:ea typeface="Malgun Gothic"/>
+                <a:cs typeface="Malgun Gothic"/>
+              </a:rPr>
+              <a:t>프로젝트 주제 구상</a:t>
+            </a:r>
+          </a:p>
+        </p:txBody>
+      </p:sp>
+      <p:sp>
+        <p:nvSpPr>
+          <p:cNvPr id="8" name="">
+            <a:extLst xmlns:a="http://schemas.openxmlformats.org/drawingml/2006/main">
+              <a:ext uri="{FF2B5EF4-FFF2-40B4-BE49-F238E27FC236}">
+                <a16:creationId xmlns:a16="http://schemas.microsoft.com/office/drawing/2014/main" id="{2BE0EC42-77DE-4510-ACF5-CE42FD82FB52}"/>
+              </a:ext>
+            </a:extLst>
+          </p:cNvPr>
+          <p:cNvSpPr>
+            <a:spLocks xmlns:a="http://schemas.openxmlformats.org/drawingml/2006/main" noGrp="1"/>
+          </p:cNvSpPr>
+          <p:nvPr/>
+        </p:nvSpPr>
+        <p:spPr>
+          <a:xfrm xmlns:a="http://schemas.openxmlformats.org/drawingml/2006/main">
+            <a:off x="4095750" y="2419350"/>
+            <a:ext cx="6667500" cy="266700"/>
+          </a:xfrm>
+          <a:prstGeom xmlns:a="http://schemas.openxmlformats.org/drawingml/2006/main" prst="rect">
+            <a:avLst/>
+          </a:prstGeom>
+          <a:noFill xmlns:a="http://schemas.openxmlformats.org/drawingml/2006/main"/>
+          <a:ln xmlns:a="http://schemas.openxmlformats.org/drawingml/2006/main" w="0">
+            <a:noFill/>
+            <a:prstDash val="solid"/>
+          </a:ln>
+        </p:spPr>
+        <p:txBody>
+          <a:bodyPr xmlns:a="http://schemas.openxmlformats.org/drawingml/2006/main"/>
+          <a:lstStyle xmlns:a="http://schemas.openxmlformats.org/drawingml/2006/main"/>
+          <a:p xmlns:a="http://schemas.openxmlformats.org/drawingml/2006/main">
+            <a:pPr>
+              <a:defRPr sz="1350">
+                <a:solidFill>
+                  <a:srgbClr val="475569"/>
+                </a:solidFill>
+                <a:latin typeface="Malgun Gothic"/>
+                <a:ea typeface="Malgun Gothic"/>
+                <a:cs typeface="Malgun Gothic"/>
+              </a:defRPr>
+            </a:pPr>
+            <a:r>
+              <a:rPr sz="1350">
+                <a:solidFill>
+                  <a:srgbClr val="475569"/>
+                </a:solidFill>
+                <a:latin typeface="Malgun Gothic"/>
+                <a:ea typeface="Malgun Gothic"/>
+                <a:cs typeface="Malgun Gothic"/>
+              </a:rPr>
+              <a:t>교통 표지판 형태 분류 주제 선정 과정 참고</a:t>
+            </a:r>
+          </a:p>
+        </p:txBody>
+      </p:sp>
+      <p:sp>
+        <p:nvSpPr>
+          <p:cNvPr id="9" name="">
+            <a:extLst xmlns:a="http://schemas.openxmlformats.org/drawingml/2006/main">
+              <a:ext uri="{FF2B5EF4-FFF2-40B4-BE49-F238E27FC236}">
+                <a16:creationId xmlns:a16="http://schemas.microsoft.com/office/drawing/2014/main" id="{E09DAE7C-52DE-40E2-969F-5E3C3117181C}"/>
+              </a:ext>
+            </a:extLst>
+          </p:cNvPr>
+          <p:cNvSpPr>
+            <a:spLocks xmlns:a="http://schemas.openxmlformats.org/drawingml/2006/main" noGrp="1"/>
+          </p:cNvSpPr>
+          <p:nvPr/>
+        </p:nvSpPr>
+        <p:spPr>
+          <a:xfrm xmlns:a="http://schemas.openxmlformats.org/drawingml/2006/main">
+            <a:off x="838200" y="2971800"/>
+            <a:ext cx="10287000" cy="495300"/>
+          </a:xfrm>
+          <a:prstGeom xmlns:a="http://schemas.openxmlformats.org/drawingml/2006/main" prst="roundRect">
+            <a:avLst>
+              <a:gd name="adj" fmla="val 15385"/>
+            </a:avLst>
+          </a:prstGeom>
+          <a:solidFill xmlns:a="http://schemas.openxmlformats.org/drawingml/2006/main">
+            <a:srgbClr val="FFFFFF"/>
+          </a:solidFill>
+          <a:ln xmlns:a="http://schemas.openxmlformats.org/drawingml/2006/main" w="9525">
+            <a:solidFill>
+              <a:srgbClr val="CBD5E1"/>
+            </a:solidFill>
+            <a:prstDash val="solid"/>
+          </a:ln>
+        </p:spPr>
+      </p:sp>
+      <p:sp>
+        <p:nvSpPr>
+          <p:cNvPr id="10" name="">
+            <a:extLst xmlns:a="http://schemas.openxmlformats.org/drawingml/2006/main">
+              <a:ext uri="{FF2B5EF4-FFF2-40B4-BE49-F238E27FC236}">
+                <a16:creationId xmlns:a16="http://schemas.microsoft.com/office/drawing/2014/main" id="{5AEDB5DF-3CC1-49FE-A315-94374EF8722B}"/>
+              </a:ext>
+            </a:extLst>
+          </p:cNvPr>
+          <p:cNvSpPr>
+            <a:spLocks xmlns:a="http://schemas.openxmlformats.org/drawingml/2006/main" noGrp="1"/>
+          </p:cNvSpPr>
+          <p:nvPr/>
+        </p:nvSpPr>
+        <p:spPr>
+          <a:xfrm xmlns:a="http://schemas.openxmlformats.org/drawingml/2006/main">
+            <a:off x="1085850" y="3114675"/>
+            <a:ext cx="209550" cy="209550"/>
+          </a:xfrm>
+          <a:prstGeom xmlns:a="http://schemas.openxmlformats.org/drawingml/2006/main" prst="ellipse">
+            <a:avLst/>
+          </a:prstGeom>
+          <a:solidFill xmlns:a="http://schemas.openxmlformats.org/drawingml/2006/main">
+            <a:srgbClr val="2563EB"/>
+          </a:solidFill>
+          <a:ln xmlns:a="http://schemas.openxmlformats.org/drawingml/2006/main" w="0">
+            <a:noFill/>
+            <a:prstDash val="solid"/>
+          </a:ln>
+        </p:spPr>
+      </p:sp>
+      <p:sp>
+        <p:nvSpPr>
+          <p:cNvPr id="11" name="">
+            <a:extLst xmlns:a="http://schemas.openxmlformats.org/drawingml/2006/main">
+              <a:ext uri="{FF2B5EF4-FFF2-40B4-BE49-F238E27FC236}">
+                <a16:creationId xmlns:a16="http://schemas.microsoft.com/office/drawing/2014/main" id="{786054A1-023B-4794-A7CD-AB78B4FF878D}"/>
+              </a:ext>
+            </a:extLst>
+          </p:cNvPr>
+          <p:cNvSpPr>
+            <a:spLocks xmlns:a="http://schemas.openxmlformats.org/drawingml/2006/main" noGrp="1"/>
+          </p:cNvSpPr>
+          <p:nvPr/>
+        </p:nvSpPr>
+        <p:spPr>
+          <a:xfrm xmlns:a="http://schemas.openxmlformats.org/drawingml/2006/main">
+            <a:off x="1504950" y="3086100"/>
+            <a:ext cx="2381250" cy="266700"/>
+          </a:xfrm>
+          <a:prstGeom xmlns:a="http://schemas.openxmlformats.org/drawingml/2006/main" prst="rect">
+            <a:avLst/>
+          </a:prstGeom>
+          <a:noFill xmlns:a="http://schemas.openxmlformats.org/drawingml/2006/main"/>
+          <a:ln xmlns:a="http://schemas.openxmlformats.org/drawingml/2006/main" w="0">
+            <a:noFill/>
+            <a:prstDash val="solid"/>
+          </a:ln>
+        </p:spPr>
+        <p:txBody>
+          <a:bodyPr xmlns:a="http://schemas.openxmlformats.org/drawingml/2006/main"/>
+          <a:lstStyle xmlns:a="http://schemas.openxmlformats.org/drawingml/2006/main"/>
+          <a:p xmlns:a="http://schemas.openxmlformats.org/drawingml/2006/main">
+            <a:pPr>
+              <a:defRPr sz="1350" b="1">
+                <a:solidFill>
+                  <a:srgbClr val="111827"/>
+                </a:solidFill>
+                <a:latin typeface="Malgun Gothic"/>
+                <a:ea typeface="Malgun Gothic"/>
+                <a:cs typeface="Malgun Gothic"/>
+              </a:defRPr>
+            </a:pPr>
+            <a:r>
+              <a:rPr sz="1350" b="1">
+                <a:solidFill>
+                  <a:srgbClr val="111827"/>
+                </a:solidFill>
+                <a:latin typeface="Malgun Gothic"/>
+                <a:ea typeface="Malgun Gothic"/>
+                <a:cs typeface="Malgun Gothic"/>
+              </a:rPr>
+              <a:t>코드 구조 설계</a:t>
+            </a:r>
+          </a:p>
+        </p:txBody>
+      </p:sp>
+      <p:sp>
+        <p:nvSpPr>
+          <p:cNvPr id="12" name="">
+            <a:extLst xmlns:a="http://schemas.openxmlformats.org/drawingml/2006/main">
+              <a:ext uri="{FF2B5EF4-FFF2-40B4-BE49-F238E27FC236}">
+                <a16:creationId xmlns:a16="http://schemas.microsoft.com/office/drawing/2014/main" id="{3BAB8E7C-093A-4738-B7E4-8D5C6C86C48F}"/>
+              </a:ext>
+            </a:extLst>
+          </p:cNvPr>
+          <p:cNvSpPr>
+            <a:spLocks xmlns:a="http://schemas.openxmlformats.org/drawingml/2006/main" noGrp="1"/>
+          </p:cNvSpPr>
+          <p:nvPr/>
+        </p:nvSpPr>
+        <p:spPr>
+          <a:xfrm xmlns:a="http://schemas.openxmlformats.org/drawingml/2006/main">
+            <a:off x="4095750" y="3086100"/>
+            <a:ext cx="6667500" cy="266700"/>
+          </a:xfrm>
+          <a:prstGeom xmlns:a="http://schemas.openxmlformats.org/drawingml/2006/main" prst="rect">
+            <a:avLst/>
+          </a:prstGeom>
+          <a:noFill xmlns:a="http://schemas.openxmlformats.org/drawingml/2006/main"/>
+          <a:ln xmlns:a="http://schemas.openxmlformats.org/drawingml/2006/main" w="0">
+            <a:noFill/>
+            <a:prstDash val="solid"/>
+          </a:ln>
+        </p:spPr>
+        <p:txBody>
+          <a:bodyPr xmlns:a="http://schemas.openxmlformats.org/drawingml/2006/main"/>
+          <a:lstStyle xmlns:a="http://schemas.openxmlformats.org/drawingml/2006/main"/>
+          <a:p xmlns:a="http://schemas.openxmlformats.org/drawingml/2006/main">
+            <a:pPr>
+              <a:defRPr sz="1350">
+                <a:solidFill>
+                  <a:srgbClr val="475569"/>
+                </a:solidFill>
+                <a:latin typeface="Malgun Gothic"/>
+                <a:ea typeface="Malgun Gothic"/>
+                <a:cs typeface="Malgun Gothic"/>
+              </a:defRPr>
+            </a:pPr>
+            <a:r>
+              <a:rPr sz="1350">
+                <a:solidFill>
+                  <a:srgbClr val="475569"/>
+                </a:solidFill>
+                <a:latin typeface="Malgun Gothic"/>
+                <a:ea typeface="Malgun Gothic"/>
+                <a:cs typeface="Malgun Gothic"/>
+              </a:rPr>
+              <a:t>데이터 생성, 전처리, 모델 학습, 예측 코드 구조 설계 참고</a:t>
+            </a:r>
+          </a:p>
+        </p:txBody>
+      </p:sp>
+      <p:sp>
+        <p:nvSpPr>
+          <p:cNvPr id="13" name="">
+            <a:extLst xmlns:a="http://schemas.openxmlformats.org/drawingml/2006/main">
+              <a:ext uri="{FF2B5EF4-FFF2-40B4-BE49-F238E27FC236}">
+                <a16:creationId xmlns:a16="http://schemas.microsoft.com/office/drawing/2014/main" id="{D56FCA98-5520-4D7B-A0E9-617AFE971DE8}"/>
+              </a:ext>
+            </a:extLst>
+          </p:cNvPr>
+          <p:cNvSpPr>
+            <a:spLocks xmlns:a="http://schemas.openxmlformats.org/drawingml/2006/main" noGrp="1"/>
+          </p:cNvSpPr>
+          <p:nvPr/>
+        </p:nvSpPr>
+        <p:spPr>
+          <a:xfrm xmlns:a="http://schemas.openxmlformats.org/drawingml/2006/main">
+            <a:off x="838200" y="3638550"/>
+            <a:ext cx="10287000" cy="495300"/>
+          </a:xfrm>
+          <a:prstGeom xmlns:a="http://schemas.openxmlformats.org/drawingml/2006/main" prst="roundRect">
+            <a:avLst>
+              <a:gd name="adj" fmla="val 15385"/>
+            </a:avLst>
+          </a:prstGeom>
+          <a:solidFill xmlns:a="http://schemas.openxmlformats.org/drawingml/2006/main">
+            <a:srgbClr val="FFFFFF"/>
+          </a:solidFill>
+          <a:ln xmlns:a="http://schemas.openxmlformats.org/drawingml/2006/main" w="9525">
+            <a:solidFill>
+              <a:srgbClr val="CBD5E1"/>
+            </a:solidFill>
+            <a:prstDash val="solid"/>
+          </a:ln>
+        </p:spPr>
+      </p:sp>
+      <p:sp>
+        <p:nvSpPr>
+          <p:cNvPr id="14" name="">
+            <a:extLst xmlns:a="http://schemas.openxmlformats.org/drawingml/2006/main">
+              <a:ext uri="{FF2B5EF4-FFF2-40B4-BE49-F238E27FC236}">
+                <a16:creationId xmlns:a16="http://schemas.microsoft.com/office/drawing/2014/main" id="{42CF13A3-FF5D-435F-8DE5-07AF56815A73}"/>
+              </a:ext>
+            </a:extLst>
+          </p:cNvPr>
+          <p:cNvSpPr>
+            <a:spLocks xmlns:a="http://schemas.openxmlformats.org/drawingml/2006/main" noGrp="1"/>
+          </p:cNvSpPr>
+          <p:nvPr/>
+        </p:nvSpPr>
+        <p:spPr>
+          <a:xfrm xmlns:a="http://schemas.openxmlformats.org/drawingml/2006/main">
+            <a:off x="1085850" y="3781425"/>
+            <a:ext cx="209550" cy="209550"/>
+          </a:xfrm>
+          <a:prstGeom xmlns:a="http://schemas.openxmlformats.org/drawingml/2006/main" prst="ellipse">
+            <a:avLst/>
+          </a:prstGeom>
+          <a:solidFill xmlns:a="http://schemas.openxmlformats.org/drawingml/2006/main">
+            <a:srgbClr val="0F766E"/>
+          </a:solidFill>
+          <a:ln xmlns:a="http://schemas.openxmlformats.org/drawingml/2006/main" w="0">
+            <a:noFill/>
+            <a:prstDash val="solid"/>
+          </a:ln>
+        </p:spPr>
+      </p:sp>
+      <p:sp>
+        <p:nvSpPr>
+          <p:cNvPr id="15" name="">
+            <a:extLst xmlns:a="http://schemas.openxmlformats.org/drawingml/2006/main">
+              <a:ext uri="{FF2B5EF4-FFF2-40B4-BE49-F238E27FC236}">
+                <a16:creationId xmlns:a16="http://schemas.microsoft.com/office/drawing/2014/main" id="{6715BA90-CE7A-44CD-9A68-5AA60437CEEB}"/>
+              </a:ext>
+            </a:extLst>
+          </p:cNvPr>
+          <p:cNvSpPr>
+            <a:spLocks xmlns:a="http://schemas.openxmlformats.org/drawingml/2006/main" noGrp="1"/>
+          </p:cNvSpPr>
+          <p:nvPr/>
+        </p:nvSpPr>
+        <p:spPr>
+          <a:xfrm xmlns:a="http://schemas.openxmlformats.org/drawingml/2006/main">
+            <a:off x="1504950" y="3752850"/>
+            <a:ext cx="2381250" cy="266700"/>
+          </a:xfrm>
+          <a:prstGeom xmlns:a="http://schemas.openxmlformats.org/drawingml/2006/main" prst="rect">
+            <a:avLst/>
+          </a:prstGeom>
+          <a:noFill xmlns:a="http://schemas.openxmlformats.org/drawingml/2006/main"/>
+          <a:ln xmlns:a="http://schemas.openxmlformats.org/drawingml/2006/main" w="0">
+            <a:noFill/>
+            <a:prstDash val="solid"/>
+          </a:ln>
+        </p:spPr>
+        <p:txBody>
+          <a:bodyPr xmlns:a="http://schemas.openxmlformats.org/drawingml/2006/main"/>
+          <a:lstStyle xmlns:a="http://schemas.openxmlformats.org/drawingml/2006/main"/>
+          <a:p xmlns:a="http://schemas.openxmlformats.org/drawingml/2006/main">
+            <a:pPr>
+              <a:defRPr sz="1350" b="1">
+                <a:solidFill>
+                  <a:srgbClr val="111827"/>
+                </a:solidFill>
+                <a:latin typeface="Malgun Gothic"/>
+                <a:ea typeface="Malgun Gothic"/>
+                <a:cs typeface="Malgun Gothic"/>
+              </a:defRPr>
+            </a:pPr>
+            <a:r>
+              <a:rPr sz="1350" b="1">
+                <a:solidFill>
+                  <a:srgbClr val="111827"/>
+                </a:solidFill>
+                <a:latin typeface="Malgun Gothic"/>
+                <a:ea typeface="Malgun Gothic"/>
+                <a:cs typeface="Malgun Gothic"/>
+              </a:rPr>
+              <a:t>코드 초안 작성</a:t>
+            </a:r>
+          </a:p>
+        </p:txBody>
+      </p:sp>
+      <p:sp>
+        <p:nvSpPr>
+          <p:cNvPr id="16" name="">
+            <a:extLst xmlns:a="http://schemas.openxmlformats.org/drawingml/2006/main">
+              <a:ext uri="{FF2B5EF4-FFF2-40B4-BE49-F238E27FC236}">
+                <a16:creationId xmlns:a16="http://schemas.microsoft.com/office/drawing/2014/main" id="{886208BC-51A6-464E-91A8-31F38206FB25}"/>
+              </a:ext>
+            </a:extLst>
+          </p:cNvPr>
+          <p:cNvSpPr>
+            <a:spLocks xmlns:a="http://schemas.openxmlformats.org/drawingml/2006/main" noGrp="1"/>
+          </p:cNvSpPr>
+          <p:nvPr/>
+        </p:nvSpPr>
+        <p:spPr>
+          <a:xfrm xmlns:a="http://schemas.openxmlformats.org/drawingml/2006/main">
+            <a:off x="4095750" y="3752850"/>
+            <a:ext cx="6667500" cy="266700"/>
+          </a:xfrm>
+          <a:prstGeom xmlns:a="http://schemas.openxmlformats.org/drawingml/2006/main" prst="rect">
+            <a:avLst/>
+          </a:prstGeom>
+          <a:noFill xmlns:a="http://schemas.openxmlformats.org/drawingml/2006/main"/>
+          <a:ln xmlns:a="http://schemas.openxmlformats.org/drawingml/2006/main" w="0">
+            <a:noFill/>
+            <a:prstDash val="solid"/>
+          </a:ln>
+        </p:spPr>
+        <p:txBody>
+          <a:bodyPr xmlns:a="http://schemas.openxmlformats.org/drawingml/2006/main"/>
+          <a:lstStyle xmlns:a="http://schemas.openxmlformats.org/drawingml/2006/main"/>
+          <a:p xmlns:a="http://schemas.openxmlformats.org/drawingml/2006/main">
+            <a:pPr>
+              <a:defRPr sz="1350">
+                <a:solidFill>
+                  <a:srgbClr val="475569"/>
+                </a:solidFill>
+                <a:latin typeface="Malgun Gothic"/>
+                <a:ea typeface="Malgun Gothic"/>
+                <a:cs typeface="Malgun Gothic"/>
+              </a:defRPr>
+            </a:pPr>
+            <a:r>
+              <a:rPr sz="1350">
+                <a:solidFill>
+                  <a:srgbClr val="475569"/>
+                </a:solidFill>
+                <a:latin typeface="Malgun Gothic"/>
+                <a:ea typeface="Malgun Gothic"/>
+                <a:cs typeface="Malgun Gothic"/>
+              </a:rPr>
+              <a:t>generate_dataset.py, train.py, predict.py 초안 작성 참고</a:t>
+            </a:r>
+          </a:p>
+        </p:txBody>
+      </p:sp>
+      <p:sp>
+        <p:nvSpPr>
+          <p:cNvPr id="17" name="">
+            <a:extLst xmlns:a="http://schemas.openxmlformats.org/drawingml/2006/main">
+              <a:ext uri="{FF2B5EF4-FFF2-40B4-BE49-F238E27FC236}">
+                <a16:creationId xmlns:a16="http://schemas.microsoft.com/office/drawing/2014/main" id="{B3D4741C-1550-4802-B9B8-E4DA7EED57DD}"/>
+              </a:ext>
+            </a:extLst>
+          </p:cNvPr>
+          <p:cNvSpPr>
+            <a:spLocks xmlns:a="http://schemas.openxmlformats.org/drawingml/2006/main" noGrp="1"/>
+          </p:cNvSpPr>
+          <p:nvPr/>
+        </p:nvSpPr>
+        <p:spPr>
+          <a:xfrm xmlns:a="http://schemas.openxmlformats.org/drawingml/2006/main">
+            <a:off x="838200" y="4305300"/>
+            <a:ext cx="10287000" cy="495300"/>
+          </a:xfrm>
+          <a:prstGeom xmlns:a="http://schemas.openxmlformats.org/drawingml/2006/main" prst="roundRect">
+            <a:avLst>
+              <a:gd name="adj" fmla="val 15385"/>
+            </a:avLst>
+          </a:prstGeom>
+          <a:solidFill xmlns:a="http://schemas.openxmlformats.org/drawingml/2006/main">
+            <a:srgbClr val="FFFFFF"/>
+          </a:solidFill>
+          <a:ln xmlns:a="http://schemas.openxmlformats.org/drawingml/2006/main" w="9525">
+            <a:solidFill>
+              <a:srgbClr val="CBD5E1"/>
+            </a:solidFill>
+            <a:prstDash val="solid"/>
+          </a:ln>
+        </p:spPr>
+      </p:sp>
+      <p:sp>
+        <p:nvSpPr>
+          <p:cNvPr id="18" name="">
+            <a:extLst xmlns:a="http://schemas.openxmlformats.org/drawingml/2006/main">
+              <a:ext uri="{FF2B5EF4-FFF2-40B4-BE49-F238E27FC236}">
+                <a16:creationId xmlns:a16="http://schemas.microsoft.com/office/drawing/2014/main" id="{7CB8C16C-5FE5-4983-A1C6-3E918CDB8692}"/>
+              </a:ext>
+            </a:extLst>
+          </p:cNvPr>
+          <p:cNvSpPr>
+            <a:spLocks xmlns:a="http://schemas.openxmlformats.org/drawingml/2006/main" noGrp="1"/>
+          </p:cNvSpPr>
+          <p:nvPr/>
+        </p:nvSpPr>
+        <p:spPr>
+          <a:xfrm xmlns:a="http://schemas.openxmlformats.org/drawingml/2006/main">
+            <a:off x="1085850" y="4448175"/>
+            <a:ext cx="209550" cy="209550"/>
+          </a:xfrm>
+          <a:prstGeom xmlns:a="http://schemas.openxmlformats.org/drawingml/2006/main" prst="ellipse">
+            <a:avLst/>
+          </a:prstGeom>
+          <a:solidFill xmlns:a="http://schemas.openxmlformats.org/drawingml/2006/main">
+            <a:srgbClr val="2563EB"/>
+          </a:solidFill>
+          <a:ln xmlns:a="http://schemas.openxmlformats.org/drawingml/2006/main" w="0">
+            <a:noFill/>
+            <a:prstDash val="solid"/>
+          </a:ln>
+        </p:spPr>
+      </p:sp>
+      <p:sp>
+        <p:nvSpPr>
+          <p:cNvPr id="19" name="">
+            <a:extLst xmlns:a="http://schemas.openxmlformats.org/drawingml/2006/main">
+              <a:ext uri="{FF2B5EF4-FFF2-40B4-BE49-F238E27FC236}">
+                <a16:creationId xmlns:a16="http://schemas.microsoft.com/office/drawing/2014/main" id="{B1F20547-137E-4C7F-AE46-E092BA6006AE}"/>
+              </a:ext>
+            </a:extLst>
+          </p:cNvPr>
+          <p:cNvSpPr>
+            <a:spLocks xmlns:a="http://schemas.openxmlformats.org/drawingml/2006/main" noGrp="1"/>
+          </p:cNvSpPr>
+          <p:nvPr/>
+        </p:nvSpPr>
+        <p:spPr>
+          <a:xfrm xmlns:a="http://schemas.openxmlformats.org/drawingml/2006/main">
+            <a:off x="1504950" y="4419600"/>
+            <a:ext cx="2381250" cy="266700"/>
+          </a:xfrm>
+          <a:prstGeom xmlns:a="http://schemas.openxmlformats.org/drawingml/2006/main" prst="rect">
+            <a:avLst/>
+          </a:prstGeom>
+          <a:noFill xmlns:a="http://schemas.openxmlformats.org/drawingml/2006/main"/>
+          <a:ln xmlns:a="http://schemas.openxmlformats.org/drawingml/2006/main" w="0">
+            <a:noFill/>
+            <a:prstDash val="solid"/>
+          </a:ln>
+        </p:spPr>
+        <p:txBody>
+          <a:bodyPr xmlns:a="http://schemas.openxmlformats.org/drawingml/2006/main"/>
+          <a:lstStyle xmlns:a="http://schemas.openxmlformats.org/drawingml/2006/main"/>
+          <a:p xmlns:a="http://schemas.openxmlformats.org/drawingml/2006/main">
+            <a:pPr>
+              <a:defRPr sz="1350" b="1">
+                <a:solidFill>
+                  <a:srgbClr val="111827"/>
+                </a:solidFill>
+                <a:latin typeface="Malgun Gothic"/>
+                <a:ea typeface="Malgun Gothic"/>
+                <a:cs typeface="Malgun Gothic"/>
+              </a:defRPr>
+            </a:pPr>
+            <a:r>
+              <a:rPr sz="1350" b="1">
+                <a:solidFill>
+                  <a:srgbClr val="111827"/>
+                </a:solidFill>
+                <a:latin typeface="Malgun Gothic"/>
+                <a:ea typeface="Malgun Gothic"/>
+                <a:cs typeface="Malgun Gothic"/>
+              </a:rPr>
+              <a:t>README 작성</a:t>
+            </a:r>
+          </a:p>
+        </p:txBody>
+      </p:sp>
+      <p:sp>
+        <p:nvSpPr>
+          <p:cNvPr id="20" name="">
+            <a:extLst xmlns:a="http://schemas.openxmlformats.org/drawingml/2006/main">
+              <a:ext uri="{FF2B5EF4-FFF2-40B4-BE49-F238E27FC236}">
+                <a16:creationId xmlns:a16="http://schemas.microsoft.com/office/drawing/2014/main" id="{D6D88634-7E83-472A-A78E-5FBC5880744E}"/>
+              </a:ext>
+            </a:extLst>
+          </p:cNvPr>
+          <p:cNvSpPr>
+            <a:spLocks xmlns:a="http://schemas.openxmlformats.org/drawingml/2006/main" noGrp="1"/>
+          </p:cNvSpPr>
+          <p:nvPr/>
+        </p:nvSpPr>
+        <p:spPr>
+          <a:xfrm xmlns:a="http://schemas.openxmlformats.org/drawingml/2006/main">
+            <a:off x="4095750" y="4419600"/>
+            <a:ext cx="6667500" cy="266700"/>
+          </a:xfrm>
+          <a:prstGeom xmlns:a="http://schemas.openxmlformats.org/drawingml/2006/main" prst="rect">
+            <a:avLst/>
+          </a:prstGeom>
+          <a:noFill xmlns:a="http://schemas.openxmlformats.org/drawingml/2006/main"/>
+          <a:ln xmlns:a="http://schemas.openxmlformats.org/drawingml/2006/main" w="0">
+            <a:noFill/>
+            <a:prstDash val="solid"/>
+          </a:ln>
+        </p:spPr>
+        <p:txBody>
+          <a:bodyPr xmlns:a="http://schemas.openxmlformats.org/drawingml/2006/main"/>
+          <a:lstStyle xmlns:a="http://schemas.openxmlformats.org/drawingml/2006/main"/>
+          <a:p xmlns:a="http://schemas.openxmlformats.org/drawingml/2006/main">
+            <a:pPr>
+              <a:defRPr sz="1350">
+                <a:solidFill>
+                  <a:srgbClr val="475569"/>
+                </a:solidFill>
+                <a:latin typeface="Malgun Gothic"/>
+                <a:ea typeface="Malgun Gothic"/>
+                <a:cs typeface="Malgun Gothic"/>
+              </a:defRPr>
+            </a:pPr>
+            <a:r>
+              <a:rPr sz="1350">
+                <a:solidFill>
+                  <a:srgbClr val="475569"/>
+                </a:solidFill>
+                <a:latin typeface="Malgun Gothic"/>
+                <a:ea typeface="Malgun Gothic"/>
+                <a:cs typeface="Malgun Gothic"/>
+              </a:rPr>
+              <a:t>GitHub 제출용 프로젝트 설명 문서 작성 참고</a:t>
+            </a:r>
+          </a:p>
+        </p:txBody>
+      </p:sp>
+      <p:sp>
+        <p:nvSpPr>
+          <p:cNvPr id="21" name="">
+            <a:extLst xmlns:a="http://schemas.openxmlformats.org/drawingml/2006/main">
+              <a:ext uri="{FF2B5EF4-FFF2-40B4-BE49-F238E27FC236}">
+                <a16:creationId xmlns:a16="http://schemas.microsoft.com/office/drawing/2014/main" id="{C4D28F51-B675-41C1-8866-963F54E1B3E3}"/>
+              </a:ext>
+            </a:extLst>
+          </p:cNvPr>
+          <p:cNvSpPr>
+            <a:spLocks xmlns:a="http://schemas.openxmlformats.org/drawingml/2006/main" noGrp="1"/>
+          </p:cNvSpPr>
+          <p:nvPr/>
+        </p:nvSpPr>
+        <p:spPr>
+          <a:xfrm xmlns:a="http://schemas.openxmlformats.org/drawingml/2006/main">
+            <a:off x="838200" y="4972050"/>
+            <a:ext cx="10287000" cy="495300"/>
+          </a:xfrm>
+          <a:prstGeom xmlns:a="http://schemas.openxmlformats.org/drawingml/2006/main" prst="roundRect">
+            <a:avLst>
+              <a:gd name="adj" fmla="val 15385"/>
+            </a:avLst>
+          </a:prstGeom>
+          <a:solidFill xmlns:a="http://schemas.openxmlformats.org/drawingml/2006/main">
+            <a:srgbClr val="FFFFFF"/>
+          </a:solidFill>
+          <a:ln xmlns:a="http://schemas.openxmlformats.org/drawingml/2006/main" w="9525">
+            <a:solidFill>
+              <a:srgbClr val="CBD5E1"/>
+            </a:solidFill>
+            <a:prstDash val="solid"/>
+          </a:ln>
+        </p:spPr>
+      </p:sp>
+      <p:sp>
+        <p:nvSpPr>
+          <p:cNvPr id="22" name="">
+            <a:extLst xmlns:a="http://schemas.openxmlformats.org/drawingml/2006/main">
+              <a:ext uri="{FF2B5EF4-FFF2-40B4-BE49-F238E27FC236}">
+                <a16:creationId xmlns:a16="http://schemas.microsoft.com/office/drawing/2014/main" id="{103044DC-0C1B-44CF-9D82-D484D151DF19}"/>
+              </a:ext>
+            </a:extLst>
+          </p:cNvPr>
+          <p:cNvSpPr>
+            <a:spLocks xmlns:a="http://schemas.openxmlformats.org/drawingml/2006/main" noGrp="1"/>
+          </p:cNvSpPr>
+          <p:nvPr/>
+        </p:nvSpPr>
+        <p:spPr>
+          <a:xfrm xmlns:a="http://schemas.openxmlformats.org/drawingml/2006/main">
+            <a:off x="1085850" y="5114925"/>
+            <a:ext cx="209550" cy="209550"/>
+          </a:xfrm>
+          <a:prstGeom xmlns:a="http://schemas.openxmlformats.org/drawingml/2006/main" prst="ellipse">
+            <a:avLst/>
+          </a:prstGeom>
+          <a:solidFill xmlns:a="http://schemas.openxmlformats.org/drawingml/2006/main">
+            <a:srgbClr val="0F766E"/>
+          </a:solidFill>
+          <a:ln xmlns:a="http://schemas.openxmlformats.org/drawingml/2006/main" w="0">
+            <a:noFill/>
+            <a:prstDash val="solid"/>
+          </a:ln>
+        </p:spPr>
+      </p:sp>
+      <p:sp>
+        <p:nvSpPr>
+          <p:cNvPr id="23" name="">
+            <a:extLst xmlns:a="http://schemas.openxmlformats.org/drawingml/2006/main">
+              <a:ext uri="{FF2B5EF4-FFF2-40B4-BE49-F238E27FC236}">
+                <a16:creationId xmlns:a16="http://schemas.microsoft.com/office/drawing/2014/main" id="{89B6EF8B-A684-4A8A-88AD-CC7C994DFE9F}"/>
+              </a:ext>
+            </a:extLst>
+          </p:cNvPr>
+          <p:cNvSpPr>
+            <a:spLocks xmlns:a="http://schemas.openxmlformats.org/drawingml/2006/main" noGrp="1"/>
+          </p:cNvSpPr>
+          <p:nvPr/>
+        </p:nvSpPr>
+        <p:spPr>
+          <a:xfrm xmlns:a="http://schemas.openxmlformats.org/drawingml/2006/main">
+            <a:off x="1504950" y="5086350"/>
+            <a:ext cx="2381250" cy="266700"/>
+          </a:xfrm>
+          <a:prstGeom xmlns:a="http://schemas.openxmlformats.org/drawingml/2006/main" prst="rect">
+            <a:avLst/>
+          </a:prstGeom>
+          <a:noFill xmlns:a="http://schemas.openxmlformats.org/drawingml/2006/main"/>
+          <a:ln xmlns:a="http://schemas.openxmlformats.org/drawingml/2006/main" w="0">
+            <a:noFill/>
+            <a:prstDash val="solid"/>
+          </a:ln>
+        </p:spPr>
+        <p:txBody>
+          <a:bodyPr xmlns:a="http://schemas.openxmlformats.org/drawingml/2006/main"/>
+          <a:lstStyle xmlns:a="http://schemas.openxmlformats.org/drawingml/2006/main"/>
+          <a:p xmlns:a="http://schemas.openxmlformats.org/drawingml/2006/main">
+            <a:pPr>
+              <a:defRPr sz="1350" b="1">
+                <a:solidFill>
+                  <a:srgbClr val="111827"/>
+                </a:solidFill>
+                <a:latin typeface="Malgun Gothic"/>
+                <a:ea typeface="Malgun Gothic"/>
+                <a:cs typeface="Malgun Gothic"/>
+              </a:defRPr>
+            </a:pPr>
+            <a:r>
+              <a:rPr sz="1350" b="1">
+                <a:solidFill>
+                  <a:srgbClr val="111827"/>
+                </a:solidFill>
+                <a:latin typeface="Malgun Gothic"/>
+                <a:ea typeface="Malgun Gothic"/>
+                <a:cs typeface="Malgun Gothic"/>
+              </a:rPr>
+              <a:t>발표 자료 작성</a:t>
+            </a:r>
+          </a:p>
+        </p:txBody>
+      </p:sp>
+      <p:sp>
+        <p:nvSpPr>
+          <p:cNvPr id="24" name="">
+            <a:extLst xmlns:a="http://schemas.openxmlformats.org/drawingml/2006/main">
+              <a:ext uri="{FF2B5EF4-FFF2-40B4-BE49-F238E27FC236}">
+                <a16:creationId xmlns:a16="http://schemas.microsoft.com/office/drawing/2014/main" id="{5B64DE15-721C-4F33-B80F-304DFD5033E5}"/>
+              </a:ext>
+            </a:extLst>
+          </p:cNvPr>
+          <p:cNvSpPr>
+            <a:spLocks xmlns:a="http://schemas.openxmlformats.org/drawingml/2006/main" noGrp="1"/>
+          </p:cNvSpPr>
+          <p:nvPr/>
+        </p:nvSpPr>
+        <p:spPr>
+          <a:xfrm xmlns:a="http://schemas.openxmlformats.org/drawingml/2006/main">
+            <a:off x="4095750" y="5086350"/>
+            <a:ext cx="6667500" cy="266700"/>
+          </a:xfrm>
+          <a:prstGeom xmlns:a="http://schemas.openxmlformats.org/drawingml/2006/main" prst="rect">
+            <a:avLst/>
+          </a:prstGeom>
+          <a:noFill xmlns:a="http://schemas.openxmlformats.org/drawingml/2006/main"/>
+          <a:ln xmlns:a="http://schemas.openxmlformats.org/drawingml/2006/main" w="0">
+            <a:noFill/>
+            <a:prstDash val="solid"/>
+          </a:ln>
+        </p:spPr>
+        <p:txBody>
+          <a:bodyPr xmlns:a="http://schemas.openxmlformats.org/drawingml/2006/main"/>
+          <a:lstStyle xmlns:a="http://schemas.openxmlformats.org/drawingml/2006/main"/>
+          <a:p xmlns:a="http://schemas.openxmlformats.org/drawingml/2006/main">
+            <a:pPr>
+              <a:defRPr sz="1350">
+                <a:solidFill>
+                  <a:srgbClr val="475569"/>
+                </a:solidFill>
+                <a:latin typeface="Malgun Gothic"/>
+                <a:ea typeface="Malgun Gothic"/>
+                <a:cs typeface="Malgun Gothic"/>
+              </a:defRPr>
+            </a:pPr>
+            <a:r>
+              <a:rPr sz="1350">
+                <a:solidFill>
+                  <a:srgbClr val="475569"/>
+                </a:solidFill>
+                <a:latin typeface="Malgun Gothic"/>
+                <a:ea typeface="Malgun Gothic"/>
+                <a:cs typeface="Malgun Gothic"/>
+              </a:rPr>
+              <a:t>PPT 구성, 역할 분담, 발표 대본, 예상 질의응답 작성 참고</a:t>
+            </a:r>
+          </a:p>
+        </p:txBody>
+      </p:sp>
+      <p:sp>
+        <p:nvSpPr>
+          <p:cNvPr id="25" name="">
+            <a:extLst xmlns:a="http://schemas.openxmlformats.org/drawingml/2006/main">
+              <a:ext uri="{FF2B5EF4-FFF2-40B4-BE49-F238E27FC236}">
+                <a16:creationId xmlns:a16="http://schemas.microsoft.com/office/drawing/2014/main" id="{2493DDDF-F162-410C-AA8C-82E31552C7CF}"/>
+              </a:ext>
+            </a:extLst>
+          </p:cNvPr>
+          <p:cNvSpPr>
+            <a:spLocks xmlns:a="http://schemas.openxmlformats.org/drawingml/2006/main" noGrp="1"/>
+          </p:cNvSpPr>
+          <p:nvPr/>
+        </p:nvSpPr>
+        <p:spPr>
+          <a:xfrm xmlns:a="http://schemas.openxmlformats.org/drawingml/2006/main">
+            <a:off x="857250" y="5886450"/>
+            <a:ext cx="10287000" cy="323850"/>
+          </a:xfrm>
+          <a:prstGeom xmlns:a="http://schemas.openxmlformats.org/drawingml/2006/main" prst="rect">
+            <a:avLst/>
+          </a:prstGeom>
+          <a:noFill xmlns:a="http://schemas.openxmlformats.org/drawingml/2006/main"/>
+          <a:ln xmlns:a="http://schemas.openxmlformats.org/drawingml/2006/main" w="0">
+            <a:noFill/>
+            <a:prstDash val="solid"/>
+          </a:ln>
+        </p:spPr>
+        <p:txBody>
+          <a:bodyPr xmlns:a="http://schemas.openxmlformats.org/drawingml/2006/main"/>
+          <a:lstStyle xmlns:a="http://schemas.openxmlformats.org/drawingml/2006/main"/>
+          <a:p xmlns:a="http://schemas.openxmlformats.org/drawingml/2006/main">
+            <a:pPr algn="ctr">
+              <a:defRPr sz="1500" b="1">
+                <a:solidFill>
+                  <a:srgbClr val="0F766E"/>
+                </a:solidFill>
+                <a:latin typeface="Malgun Gothic"/>
+                <a:ea typeface="Malgun Gothic"/>
+                <a:cs typeface="Malgun Gothic"/>
+              </a:defRPr>
+            </a:pPr>
+            <a:r>
+              <a:rPr sz="1500" b="1">
+                <a:solidFill>
+                  <a:srgbClr val="0F766E"/>
+                </a:solidFill>
+                <a:latin typeface="Malgun Gothic"/>
+                <a:ea typeface="Malgun Gothic"/>
+                <a:cs typeface="Malgun Gothic"/>
+              </a:rPr>
+              <a:t>최종 코드와 발표 내용은 과제 목적에 맞게 검토하여 사용했습니다.</a:t>
+            </a:r>
+          </a:p>
+        </p:txBody>
+      </p:sp>
+      <p:sp>
+        <p:nvSpPr>
+          <p:cNvPr id="26" name="">
+            <a:extLst xmlns:a="http://schemas.openxmlformats.org/drawingml/2006/main">
+              <a:ext uri="{FF2B5EF4-FFF2-40B4-BE49-F238E27FC236}">
+                <a16:creationId xmlns:a16="http://schemas.microsoft.com/office/drawing/2014/main" id="{8B14CCD3-2D24-4662-B8F3-5BC6AE60C006}"/>
+              </a:ext>
+            </a:extLst>
+          </p:cNvPr>
+          <p:cNvSpPr>
+            <a:spLocks xmlns:a="http://schemas.openxmlformats.org/drawingml/2006/main" noGrp="1"/>
+          </p:cNvSpPr>
+          <p:nvPr/>
+        </p:nvSpPr>
+        <p:spPr>
+          <a:xfrm xmlns:a="http://schemas.openxmlformats.org/drawingml/2006/main">
+            <a:off x="609600" y="6400800"/>
+            <a:ext cx="4000500" cy="228600"/>
+          </a:xfrm>
+          <a:prstGeom xmlns:a="http://schemas.openxmlformats.org/drawingml/2006/main" prst="rect">
+            <a:avLst/>
+          </a:prstGeom>
+          <a:noFill xmlns:a="http://schemas.openxmlformats.org/drawingml/2006/main"/>
+          <a:ln xmlns:a="http://schemas.openxmlformats.org/drawingml/2006/main" w="0">
+            <a:noFill/>
+            <a:prstDash val="solid"/>
+          </a:ln>
+        </p:spPr>
+        <p:txBody>
+          <a:bodyPr xmlns:a="http://schemas.openxmlformats.org/drawingml/2006/main"/>
+          <a:lstStyle xmlns:a="http://schemas.openxmlformats.org/drawingml/2006/main"/>
+          <a:p xmlns:a="http://schemas.openxmlformats.org/drawingml/2006/main">
+            <a:pPr>
+              <a:defRPr sz="825">
+                <a:solidFill>
+                  <a:srgbClr val="64748B"/>
+                </a:solidFill>
+                <a:latin typeface="Malgun Gothic"/>
+                <a:ea typeface="Malgun Gothic"/>
+                <a:cs typeface="Malgun Gothic"/>
+              </a:defRPr>
+            </a:pPr>
+            <a:r>
+              <a:rPr sz="825">
+                <a:solidFill>
+                  <a:srgbClr val="64748B"/>
+                </a:solidFill>
+                <a:latin typeface="Malgun Gothic"/>
+                <a:ea typeface="Malgun Gothic"/>
+                <a:cs typeface="Malgun Gothic"/>
+              </a:rPr>
+              <a:t>Traffic Sign Shape Classification</a:t>
+            </a:r>
+          </a:p>
+        </p:txBody>
+      </p:sp>
+      <p:sp>
+        <p:nvSpPr>
+          <p:cNvPr id="27" name="">
+            <a:extLst xmlns:a="http://schemas.openxmlformats.org/drawingml/2006/main">
+              <a:ext uri="{FF2B5EF4-FFF2-40B4-BE49-F238E27FC236}">
+                <a16:creationId xmlns:a16="http://schemas.microsoft.com/office/drawing/2014/main" id="{3C01D6EF-6A9E-4B6A-AD8B-1D5BA1418085}"/>
+              </a:ext>
+            </a:extLst>
+          </p:cNvPr>
+          <p:cNvSpPr>
+            <a:spLocks xmlns:a="http://schemas.openxmlformats.org/drawingml/2006/main" noGrp="1"/>
+          </p:cNvSpPr>
+          <p:nvPr/>
+        </p:nvSpPr>
+        <p:spPr>
+          <a:xfrm xmlns:a="http://schemas.openxmlformats.org/drawingml/2006/main">
+            <a:off x="11049000" y="6343650"/>
+            <a:ext cx="533400" cy="304800"/>
+          </a:xfrm>
+          <a:prstGeom xmlns:a="http://schemas.openxmlformats.org/drawingml/2006/main" prst="rect">
+            <a:avLst/>
+          </a:prstGeom>
+          <a:noFill xmlns:a="http://schemas.openxmlformats.org/drawingml/2006/main"/>
+          <a:ln xmlns:a="http://schemas.openxmlformats.org/drawingml/2006/main" w="0">
+            <a:noFill/>
+            <a:prstDash val="solid"/>
+          </a:ln>
+        </p:spPr>
+        <p:txBody>
+          <a:bodyPr xmlns:a="http://schemas.openxmlformats.org/drawingml/2006/main"/>
+          <a:lstStyle xmlns:a="http://schemas.openxmlformats.org/drawingml/2006/main"/>
+          <a:p xmlns:a="http://schemas.openxmlformats.org/drawingml/2006/main">
+            <a:pPr algn="r">
+              <a:defRPr sz="1200" b="1">
+                <a:solidFill>
+                  <a:srgbClr val="0F766E"/>
+                </a:solidFill>
+                <a:latin typeface="Malgun Gothic"/>
+                <a:ea typeface="Malgun Gothic"/>
+                <a:cs typeface="Malgun Gothic"/>
+              </a:defRPr>
+            </a:pPr>
+            <a:r>
+              <a:rPr sz="1200" b="1">
+                <a:solidFill>
+                  <a:srgbClr val="0F766E"/>
+                </a:solidFill>
+                <a:latin typeface="Malgun Gothic"/>
+                <a:ea typeface="Malgun Gothic"/>
+                <a:cs typeface="Malgun Gothic"/>
+              </a:rPr>
+              <a:t>10</a:t>
+            </a:r>
+          </a:p>
+        </p:txBody>
+      </p:sp>
+    </p:spTree>
+    <p:extLst>
+      <p:ext uri="{BB962C8B-B14F-4D97-AF65-F5344CB8AC3E}">
+        <p14:creationId xmlns:p14="http://schemas.microsoft.com/office/powerpoint/2010/main" val="347866304"/>
       </p:ext>
     </p:extLst>
   </p:cSld>
@@ -2320,7 +3675,7 @@
           <p:cNvPr id="1" name="">
             <a:extLst xmlns:a="http://schemas.openxmlformats.org/drawingml/2006/main">
               <a:ext uri="{FF2B5EF4-FFF2-40B4-BE49-F238E27FC236}">
-                <a16:creationId xmlns:a16="http://schemas.microsoft.com/office/drawing/2014/main" id="{A993B438-D65F-45F6-997B-BBD36453A786}"/>
+                <a16:creationId xmlns:a16="http://schemas.microsoft.com/office/drawing/2014/main" id="{3B06C538-6221-4388-BC5D-D5261C9328A9}"/>
               </a:ext>
             </a:extLst>
           </p:cNvPr>
@@ -2376,7 +3731,7 @@
           <p:cNvPr id="2" name="">
             <a:extLst xmlns:a="http://schemas.openxmlformats.org/drawingml/2006/main">
               <a:ext uri="{FF2B5EF4-FFF2-40B4-BE49-F238E27FC236}">
-                <a16:creationId xmlns:a16="http://schemas.microsoft.com/office/drawing/2014/main" id="{94B3C0A1-F4D3-4DF1-8315-8D195AC631F1}"/>
+                <a16:creationId xmlns:a16="http://schemas.microsoft.com/office/drawing/2014/main" id="{CED5B551-7E04-41E4-A1D2-54F5BCF9C911}"/>
               </a:ext>
             </a:extLst>
           </p:cNvPr>
@@ -2432,7 +3787,7 @@
           <p:cNvPr id="3" name="">
             <a:extLst xmlns:a="http://schemas.openxmlformats.org/drawingml/2006/main">
               <a:ext uri="{FF2B5EF4-FFF2-40B4-BE49-F238E27FC236}">
-                <a16:creationId xmlns:a16="http://schemas.microsoft.com/office/drawing/2014/main" id="{2CFB218F-0136-4FD1-9D21-4C281B4A4A2D}"/>
+                <a16:creationId xmlns:a16="http://schemas.microsoft.com/office/drawing/2014/main" id="{FFDC46D6-B069-4E37-9021-A20BE7218703}"/>
               </a:ext>
             </a:extLst>
           </p:cNvPr>
@@ -2465,7 +3820,7 @@
           <p:cNvPr id="4" name="">
             <a:extLst xmlns:a="http://schemas.openxmlformats.org/drawingml/2006/main">
               <a:ext uri="{FF2B5EF4-FFF2-40B4-BE49-F238E27FC236}">
-                <a16:creationId xmlns:a16="http://schemas.microsoft.com/office/drawing/2014/main" id="{A4307721-00E7-4F6B-9733-33FC31B29A3E}"/>
+                <a16:creationId xmlns:a16="http://schemas.microsoft.com/office/drawing/2014/main" id="{10B8561D-B2D3-4940-B81B-8684217D11D2}"/>
               </a:ext>
             </a:extLst>
           </p:cNvPr>
@@ -2498,7 +3853,7 @@
           <p:cNvPr id="5" name="">
             <a:extLst xmlns:a="http://schemas.openxmlformats.org/drawingml/2006/main">
               <a:ext uri="{FF2B5EF4-FFF2-40B4-BE49-F238E27FC236}">
-                <a16:creationId xmlns:a16="http://schemas.microsoft.com/office/drawing/2014/main" id="{031B0468-DB65-495D-9AF4-4E86DD0E4AF2}"/>
+                <a16:creationId xmlns:a16="http://schemas.microsoft.com/office/drawing/2014/main" id="{43C9BDE3-8B21-494F-BCD1-F4F447A8248D}"/>
               </a:ext>
             </a:extLst>
           </p:cNvPr>
@@ -2554,7 +3909,7 @@
           <p:cNvPr id="6" name="">
             <a:extLst xmlns:a="http://schemas.openxmlformats.org/drawingml/2006/main">
               <a:ext uri="{FF2B5EF4-FFF2-40B4-BE49-F238E27FC236}">
-                <a16:creationId xmlns:a16="http://schemas.microsoft.com/office/drawing/2014/main" id="{2793DAAA-998A-49CD-905A-38E9E7FB67C2}"/>
+                <a16:creationId xmlns:a16="http://schemas.microsoft.com/office/drawing/2014/main" id="{C51B06B7-8043-4AD3-AA79-232123F73525}"/>
               </a:ext>
             </a:extLst>
           </p:cNvPr>
@@ -2587,7 +3942,7 @@
           <p:cNvPr id="7" name="">
             <a:extLst xmlns:a="http://schemas.openxmlformats.org/drawingml/2006/main">
               <a:ext uri="{FF2B5EF4-FFF2-40B4-BE49-F238E27FC236}">
-                <a16:creationId xmlns:a16="http://schemas.microsoft.com/office/drawing/2014/main" id="{F3B54BDA-C456-48B5-BD45-924FD8DCC1B6}"/>
+                <a16:creationId xmlns:a16="http://schemas.microsoft.com/office/drawing/2014/main" id="{CFA02F40-8329-4334-8EDF-BE67B81DBABA}"/>
               </a:ext>
             </a:extLst>
           </p:cNvPr>
@@ -2643,7 +3998,7 @@
           <p:cNvPr id="8" name="">
             <a:extLst xmlns:a="http://schemas.openxmlformats.org/drawingml/2006/main">
               <a:ext uri="{FF2B5EF4-FFF2-40B4-BE49-F238E27FC236}">
-                <a16:creationId xmlns:a16="http://schemas.microsoft.com/office/drawing/2014/main" id="{1FA32EB5-CBD1-467F-B706-43C7A49CBB83}"/>
+                <a16:creationId xmlns:a16="http://schemas.microsoft.com/office/drawing/2014/main" id="{7AED26A5-B263-46D7-BD51-9D6BE860CE58}"/>
               </a:ext>
             </a:extLst>
           </p:cNvPr>
@@ -2676,7 +4031,7 @@
           <p:cNvPr id="9" name="">
             <a:extLst xmlns:a="http://schemas.openxmlformats.org/drawingml/2006/main">
               <a:ext uri="{FF2B5EF4-FFF2-40B4-BE49-F238E27FC236}">
-                <a16:creationId xmlns:a16="http://schemas.microsoft.com/office/drawing/2014/main" id="{CBB231D1-ABBA-4DA4-A622-8BDDD46DF120}"/>
+                <a16:creationId xmlns:a16="http://schemas.microsoft.com/office/drawing/2014/main" id="{4AE79C63-723B-4490-A22F-73DC4498E708}"/>
               </a:ext>
             </a:extLst>
           </p:cNvPr>
@@ -2732,7 +4087,7 @@
           <p:cNvPr id="10" name="">
             <a:extLst xmlns:a="http://schemas.openxmlformats.org/drawingml/2006/main">
               <a:ext uri="{FF2B5EF4-FFF2-40B4-BE49-F238E27FC236}">
-                <a16:creationId xmlns:a16="http://schemas.microsoft.com/office/drawing/2014/main" id="{05632F81-F8EF-468F-BB3C-F2F33D55D7B2}"/>
+                <a16:creationId xmlns:a16="http://schemas.microsoft.com/office/drawing/2014/main" id="{441FE61D-1DC8-403B-B365-9D61D199FD8C}"/>
               </a:ext>
             </a:extLst>
           </p:cNvPr>
@@ -2765,7 +4120,7 @@
           <p:cNvPr id="11" name="">
             <a:extLst xmlns:a="http://schemas.openxmlformats.org/drawingml/2006/main">
               <a:ext uri="{FF2B5EF4-FFF2-40B4-BE49-F238E27FC236}">
-                <a16:creationId xmlns:a16="http://schemas.microsoft.com/office/drawing/2014/main" id="{0B1289CE-455B-47DA-9437-B09492D3B198}"/>
+                <a16:creationId xmlns:a16="http://schemas.microsoft.com/office/drawing/2014/main" id="{4CF5CECA-9639-459E-B178-D5AC884D50F2}"/>
               </a:ext>
             </a:extLst>
           </p:cNvPr>
@@ -2821,7 +4176,7 @@
           <p:cNvPr id="12" name="">
             <a:extLst xmlns:a="http://schemas.openxmlformats.org/drawingml/2006/main">
               <a:ext uri="{FF2B5EF4-FFF2-40B4-BE49-F238E27FC236}">
-                <a16:creationId xmlns:a16="http://schemas.microsoft.com/office/drawing/2014/main" id="{F8486ABF-4A28-4EAC-AEF9-60D453716239}"/>
+                <a16:creationId xmlns:a16="http://schemas.microsoft.com/office/drawing/2014/main" id="{93C81974-349B-4A42-A089-ECC9D0AFD0C8}"/>
               </a:ext>
             </a:extLst>
           </p:cNvPr>
@@ -2856,7 +4211,7 @@
           <p:cNvPr id="13" name="">
             <a:extLst xmlns:a="http://schemas.openxmlformats.org/drawingml/2006/main">
               <a:ext uri="{FF2B5EF4-FFF2-40B4-BE49-F238E27FC236}">
-                <a16:creationId xmlns:a16="http://schemas.microsoft.com/office/drawing/2014/main" id="{C1782626-16CE-429F-8BC4-61DCF762093C}"/>
+                <a16:creationId xmlns:a16="http://schemas.microsoft.com/office/drawing/2014/main" id="{8B38E762-FED4-4E83-93CE-BD161E31B5DD}"/>
               </a:ext>
             </a:extLst>
           </p:cNvPr>
@@ -2889,7 +4244,7 @@
           <p:cNvPr id="14" name="">
             <a:extLst xmlns:a="http://schemas.openxmlformats.org/drawingml/2006/main">
               <a:ext uri="{FF2B5EF4-FFF2-40B4-BE49-F238E27FC236}">
-                <a16:creationId xmlns:a16="http://schemas.microsoft.com/office/drawing/2014/main" id="{6486F082-68A4-43B5-B33A-3E47945CA813}"/>
+                <a16:creationId xmlns:a16="http://schemas.microsoft.com/office/drawing/2014/main" id="{59BC4931-9509-4514-96EF-62020ECAF2B2}"/>
               </a:ext>
             </a:extLst>
           </p:cNvPr>
@@ -2945,7 +4300,7 @@
           <p:cNvPr id="15" name="">
             <a:extLst xmlns:a="http://schemas.openxmlformats.org/drawingml/2006/main">
               <a:ext uri="{FF2B5EF4-FFF2-40B4-BE49-F238E27FC236}">
-                <a16:creationId xmlns:a16="http://schemas.microsoft.com/office/drawing/2014/main" id="{A2A70267-613C-404A-B89C-3F242FFF9914}"/>
+                <a16:creationId xmlns:a16="http://schemas.microsoft.com/office/drawing/2014/main" id="{41EE606E-063E-4928-BE2C-C0D71713A4DC}"/>
               </a:ext>
             </a:extLst>
           </p:cNvPr>
@@ -3047,7 +4402,7 @@
           <p:cNvPr id="16" name="">
             <a:extLst xmlns:a="http://schemas.openxmlformats.org/drawingml/2006/main">
               <a:ext uri="{FF2B5EF4-FFF2-40B4-BE49-F238E27FC236}">
-                <a16:creationId xmlns:a16="http://schemas.microsoft.com/office/drawing/2014/main" id="{9DB039DF-347A-4B70-B8C8-6FD9A7593E06}"/>
+                <a16:creationId xmlns:a16="http://schemas.microsoft.com/office/drawing/2014/main" id="{FC1540CB-83BF-45D4-B6B3-742E189580F1}"/>
               </a:ext>
             </a:extLst>
           </p:cNvPr>
@@ -3103,7 +4458,7 @@
           <p:cNvPr id="17" name="">
             <a:extLst xmlns:a="http://schemas.openxmlformats.org/drawingml/2006/main">
               <a:ext uri="{FF2B5EF4-FFF2-40B4-BE49-F238E27FC236}">
-                <a16:creationId xmlns:a16="http://schemas.microsoft.com/office/drawing/2014/main" id="{EBFC99A4-03EA-48B3-8472-8CD45ED3529B}"/>
+                <a16:creationId xmlns:a16="http://schemas.microsoft.com/office/drawing/2014/main" id="{6438E86E-AC4B-4F50-9197-4A16F67EEE18}"/>
               </a:ext>
             </a:extLst>
           </p:cNvPr>
@@ -3157,7 +4512,7 @@
     </p:spTree>
     <p:extLst>
       <p:ext uri="{BB962C8B-B14F-4D97-AF65-F5344CB8AC3E}">
-        <p14:creationId xmlns:p14="http://schemas.microsoft.com/office/powerpoint/2010/main" val="352698317"/>
+        <p14:creationId xmlns:p14="http://schemas.microsoft.com/office/powerpoint/2010/main" val="669788528"/>
       </p:ext>
     </p:extLst>
   </p:cSld>
@@ -3188,7 +4543,7 @@
           <p:cNvPr id="1" name="">
             <a:extLst xmlns:a="http://schemas.openxmlformats.org/drawingml/2006/main">
               <a:ext uri="{FF2B5EF4-FFF2-40B4-BE49-F238E27FC236}">
-                <a16:creationId xmlns:a16="http://schemas.microsoft.com/office/drawing/2014/main" id="{6514DBE7-799B-46E1-81E1-2F0EEA0CECD4}"/>
+                <a16:creationId xmlns:a16="http://schemas.microsoft.com/office/drawing/2014/main" id="{EBE7D0A1-5D8B-4CDD-B00B-EE8207C4C07B}"/>
               </a:ext>
             </a:extLst>
           </p:cNvPr>
@@ -3244,7 +4599,7 @@
           <p:cNvPr id="2" name="">
             <a:extLst xmlns:a="http://schemas.openxmlformats.org/drawingml/2006/main">
               <a:ext uri="{FF2B5EF4-FFF2-40B4-BE49-F238E27FC236}">
-                <a16:creationId xmlns:a16="http://schemas.microsoft.com/office/drawing/2014/main" id="{A6FADAA8-552A-4973-94F7-D2BB0ECB5D6A}"/>
+                <a16:creationId xmlns:a16="http://schemas.microsoft.com/office/drawing/2014/main" id="{4325E381-D635-4586-A5A3-0BA7D506CD83}"/>
               </a:ext>
             </a:extLst>
           </p:cNvPr>
@@ -3300,7 +4655,7 @@
           <p:cNvPr id="3" name="">
             <a:extLst xmlns:a="http://schemas.openxmlformats.org/drawingml/2006/main">
               <a:ext uri="{FF2B5EF4-FFF2-40B4-BE49-F238E27FC236}">
-                <a16:creationId xmlns:a16="http://schemas.microsoft.com/office/drawing/2014/main" id="{8B688D43-A2C6-48E5-AFBE-50B84411F5BA}"/>
+                <a16:creationId xmlns:a16="http://schemas.microsoft.com/office/drawing/2014/main" id="{B39CF6C1-4EC8-44C1-90CC-F65DD571EEA1}"/>
               </a:ext>
             </a:extLst>
           </p:cNvPr>
@@ -3333,7 +4688,7 @@
           <p:cNvPr id="4" name="">
             <a:extLst xmlns:a="http://schemas.openxmlformats.org/drawingml/2006/main">
               <a:ext uri="{FF2B5EF4-FFF2-40B4-BE49-F238E27FC236}">
-                <a16:creationId xmlns:a16="http://schemas.microsoft.com/office/drawing/2014/main" id="{14E42360-C316-4AF6-BC57-DFF2DBF1A70F}"/>
+                <a16:creationId xmlns:a16="http://schemas.microsoft.com/office/drawing/2014/main" id="{81D354FB-2D5C-460B-B856-B8F2AD4714BD}"/>
               </a:ext>
             </a:extLst>
           </p:cNvPr>
@@ -3368,7 +4723,7 @@
           <p:cNvPr id="5" name="">
             <a:extLst xmlns:a="http://schemas.openxmlformats.org/drawingml/2006/main">
               <a:ext uri="{FF2B5EF4-FFF2-40B4-BE49-F238E27FC236}">
-                <a16:creationId xmlns:a16="http://schemas.microsoft.com/office/drawing/2014/main" id="{56E6B137-2C8B-4C2B-BBFB-FAB9677E0320}"/>
+                <a16:creationId xmlns:a16="http://schemas.microsoft.com/office/drawing/2014/main" id="{848E16DA-812B-47A3-99AB-4AC3F5C5C2B7}"/>
               </a:ext>
             </a:extLst>
           </p:cNvPr>
@@ -3401,7 +4756,7 @@
           <p:cNvPr id="6" name="">
             <a:extLst xmlns:a="http://schemas.openxmlformats.org/drawingml/2006/main">
               <a:ext uri="{FF2B5EF4-FFF2-40B4-BE49-F238E27FC236}">
-                <a16:creationId xmlns:a16="http://schemas.microsoft.com/office/drawing/2014/main" id="{EEFC8A13-8510-4115-97DD-512D7CE29DDE}"/>
+                <a16:creationId xmlns:a16="http://schemas.microsoft.com/office/drawing/2014/main" id="{EFF80F0C-6F4E-435F-B97E-21E47165D76F}"/>
               </a:ext>
             </a:extLst>
           </p:cNvPr>
@@ -3457,7 +4812,7 @@
           <p:cNvPr id="7" name="">
             <a:extLst xmlns:a="http://schemas.openxmlformats.org/drawingml/2006/main">
               <a:ext uri="{FF2B5EF4-FFF2-40B4-BE49-F238E27FC236}">
-                <a16:creationId xmlns:a16="http://schemas.microsoft.com/office/drawing/2014/main" id="{458C449B-B561-41C3-886E-F076C01FD5DF}"/>
+                <a16:creationId xmlns:a16="http://schemas.microsoft.com/office/drawing/2014/main" id="{F56BCDC3-99D1-4E54-AD5F-155238039837}"/>
               </a:ext>
             </a:extLst>
           </p:cNvPr>
@@ -3536,7 +4891,7 @@
           <p:cNvPr id="8" name="">
             <a:extLst xmlns:a="http://schemas.openxmlformats.org/drawingml/2006/main">
               <a:ext uri="{FF2B5EF4-FFF2-40B4-BE49-F238E27FC236}">
-                <a16:creationId xmlns:a16="http://schemas.microsoft.com/office/drawing/2014/main" id="{1A9B49C7-D6C6-457A-9BC4-6DCD63B58B47}"/>
+                <a16:creationId xmlns:a16="http://schemas.microsoft.com/office/drawing/2014/main" id="{78EE41C9-E81C-442D-8ED5-1E6F98E5715A}"/>
               </a:ext>
             </a:extLst>
           </p:cNvPr>
@@ -3571,7 +4926,7 @@
           <p:cNvPr id="9" name="">
             <a:extLst xmlns:a="http://schemas.openxmlformats.org/drawingml/2006/main">
               <a:ext uri="{FF2B5EF4-FFF2-40B4-BE49-F238E27FC236}">
-                <a16:creationId xmlns:a16="http://schemas.microsoft.com/office/drawing/2014/main" id="{80B336B5-7747-4E26-90D9-5E047357CC69}"/>
+                <a16:creationId xmlns:a16="http://schemas.microsoft.com/office/drawing/2014/main" id="{B60A8C70-3D5B-442A-929F-30FA5A031E68}"/>
               </a:ext>
             </a:extLst>
           </p:cNvPr>
@@ -3604,7 +4959,7 @@
           <p:cNvPr id="10" name="">
             <a:extLst xmlns:a="http://schemas.openxmlformats.org/drawingml/2006/main">
               <a:ext uri="{FF2B5EF4-FFF2-40B4-BE49-F238E27FC236}">
-                <a16:creationId xmlns:a16="http://schemas.microsoft.com/office/drawing/2014/main" id="{2B187D16-E7CF-4DB0-8945-077795275CE0}"/>
+                <a16:creationId xmlns:a16="http://schemas.microsoft.com/office/drawing/2014/main" id="{497AA040-E41A-4EDB-9B39-5DA5B7674020}"/>
               </a:ext>
             </a:extLst>
           </p:cNvPr>
@@ -3660,7 +5015,7 @@
           <p:cNvPr id="11" name="">
             <a:extLst xmlns:a="http://schemas.openxmlformats.org/drawingml/2006/main">
               <a:ext uri="{FF2B5EF4-FFF2-40B4-BE49-F238E27FC236}">
-                <a16:creationId xmlns:a16="http://schemas.microsoft.com/office/drawing/2014/main" id="{9404BB33-75A5-4B6B-92FD-456D2C1C381F}"/>
+                <a16:creationId xmlns:a16="http://schemas.microsoft.com/office/drawing/2014/main" id="{82852200-B5AB-43BF-A771-A2C2EDEEB89A}"/>
               </a:ext>
             </a:extLst>
           </p:cNvPr>
@@ -3762,7 +5117,7 @@
           <p:cNvPr id="12" name="">
             <a:extLst xmlns:a="http://schemas.openxmlformats.org/drawingml/2006/main">
               <a:ext uri="{FF2B5EF4-FFF2-40B4-BE49-F238E27FC236}">
-                <a16:creationId xmlns:a16="http://schemas.microsoft.com/office/drawing/2014/main" id="{EF1EAC76-ED38-45C9-BC20-99C660ACCF3E}"/>
+                <a16:creationId xmlns:a16="http://schemas.microsoft.com/office/drawing/2014/main" id="{27EDACAC-5390-4A8B-BEAB-409CCC916782}"/>
               </a:ext>
             </a:extLst>
           </p:cNvPr>
@@ -3797,7 +5152,7 @@
           <p:cNvPr id="13" name="">
             <a:extLst xmlns:a="http://schemas.openxmlformats.org/drawingml/2006/main">
               <a:ext uri="{FF2B5EF4-FFF2-40B4-BE49-F238E27FC236}">
-                <a16:creationId xmlns:a16="http://schemas.microsoft.com/office/drawing/2014/main" id="{1FAADD1A-330A-4A20-B77A-0C537B30256A}"/>
+                <a16:creationId xmlns:a16="http://schemas.microsoft.com/office/drawing/2014/main" id="{E5E8531E-83CB-42F0-B699-0F6C231D4EF3}"/>
               </a:ext>
             </a:extLst>
           </p:cNvPr>
@@ -3830,7 +5185,7 @@
           <p:cNvPr id="14" name="">
             <a:extLst xmlns:a="http://schemas.openxmlformats.org/drawingml/2006/main">
               <a:ext uri="{FF2B5EF4-FFF2-40B4-BE49-F238E27FC236}">
-                <a16:creationId xmlns:a16="http://schemas.microsoft.com/office/drawing/2014/main" id="{1D169E68-EAE8-4A58-99B5-4EB9912C85BE}"/>
+                <a16:creationId xmlns:a16="http://schemas.microsoft.com/office/drawing/2014/main" id="{2389F85E-86DD-4064-89AE-80BA21BD7116}"/>
               </a:ext>
             </a:extLst>
           </p:cNvPr>
@@ -3886,7 +5241,7 @@
           <p:cNvPr id="15" name="">
             <a:extLst xmlns:a="http://schemas.openxmlformats.org/drawingml/2006/main">
               <a:ext uri="{FF2B5EF4-FFF2-40B4-BE49-F238E27FC236}">
-                <a16:creationId xmlns:a16="http://schemas.microsoft.com/office/drawing/2014/main" id="{AB009C41-46BB-4DDC-849C-FAB46BBDBE31}"/>
+                <a16:creationId xmlns:a16="http://schemas.microsoft.com/office/drawing/2014/main" id="{E80BD796-80DE-4362-A893-BF061D4BCF67}"/>
               </a:ext>
             </a:extLst>
           </p:cNvPr>
@@ -3965,7 +5320,7 @@
           <p:cNvPr id="16" name="">
             <a:extLst xmlns:a="http://schemas.openxmlformats.org/drawingml/2006/main">
               <a:ext uri="{FF2B5EF4-FFF2-40B4-BE49-F238E27FC236}">
-                <a16:creationId xmlns:a16="http://schemas.microsoft.com/office/drawing/2014/main" id="{095BED03-D282-4526-BBE4-1FCDDF601BD4}"/>
+                <a16:creationId xmlns:a16="http://schemas.microsoft.com/office/drawing/2014/main" id="{B285DBD4-0B9D-4CAE-97FB-1B081626AD21}"/>
               </a:ext>
             </a:extLst>
           </p:cNvPr>
@@ -4021,7 +5376,7 @@
           <p:cNvPr id="17" name="">
             <a:extLst xmlns:a="http://schemas.openxmlformats.org/drawingml/2006/main">
               <a:ext uri="{FF2B5EF4-FFF2-40B4-BE49-F238E27FC236}">
-                <a16:creationId xmlns:a16="http://schemas.microsoft.com/office/drawing/2014/main" id="{85E41DD9-0AC6-4C3A-A75A-C47D0E7AEF02}"/>
+                <a16:creationId xmlns:a16="http://schemas.microsoft.com/office/drawing/2014/main" id="{01C9F71C-F8A3-414F-8A17-582F9AEA2475}"/>
               </a:ext>
             </a:extLst>
           </p:cNvPr>
@@ -4077,7 +5432,7 @@
           <p:cNvPr id="18" name="">
             <a:extLst xmlns:a="http://schemas.openxmlformats.org/drawingml/2006/main">
               <a:ext uri="{FF2B5EF4-FFF2-40B4-BE49-F238E27FC236}">
-                <a16:creationId xmlns:a16="http://schemas.microsoft.com/office/drawing/2014/main" id="{6E72C007-CC42-4FC8-90F6-CF081891DE67}"/>
+                <a16:creationId xmlns:a16="http://schemas.microsoft.com/office/drawing/2014/main" id="{09EC2D72-08EB-4801-9281-93F8487D63E6}"/>
               </a:ext>
             </a:extLst>
           </p:cNvPr>
@@ -4131,7 +5486,7 @@
     </p:spTree>
     <p:extLst>
       <p:ext uri="{BB962C8B-B14F-4D97-AF65-F5344CB8AC3E}">
-        <p14:creationId xmlns:p14="http://schemas.microsoft.com/office/powerpoint/2010/main" val="1184699948"/>
+        <p14:creationId xmlns:p14="http://schemas.microsoft.com/office/powerpoint/2010/main" val="651922032"/>
       </p:ext>
     </p:extLst>
   </p:cSld>
@@ -4162,7 +5517,7 @@
           <p:cNvPr id="1" name="">
             <a:extLst xmlns:a="http://schemas.openxmlformats.org/drawingml/2006/main">
               <a:ext uri="{FF2B5EF4-FFF2-40B4-BE49-F238E27FC236}">
-                <a16:creationId xmlns:a16="http://schemas.microsoft.com/office/drawing/2014/main" id="{77ECEB16-7E3D-4521-B323-354EE5A0203E}"/>
+                <a16:creationId xmlns:a16="http://schemas.microsoft.com/office/drawing/2014/main" id="{B9E26C9E-9869-407B-90C4-8404FF3BD2BD}"/>
               </a:ext>
             </a:extLst>
           </p:cNvPr>
@@ -4218,7 +5573,7 @@
           <p:cNvPr id="2" name="">
             <a:extLst xmlns:a="http://schemas.openxmlformats.org/drawingml/2006/main">
               <a:ext uri="{FF2B5EF4-FFF2-40B4-BE49-F238E27FC236}">
-                <a16:creationId xmlns:a16="http://schemas.microsoft.com/office/drawing/2014/main" id="{63B4F1AF-30DB-4751-8939-C79EFCD9B387}"/>
+                <a16:creationId xmlns:a16="http://schemas.microsoft.com/office/drawing/2014/main" id="{4289A10F-0645-4BF2-8AD5-D499BBC0A917}"/>
               </a:ext>
             </a:extLst>
           </p:cNvPr>
@@ -4274,7 +5629,7 @@
           <p:cNvPr id="3" name="">
             <a:extLst xmlns:a="http://schemas.openxmlformats.org/drawingml/2006/main">
               <a:ext uri="{FF2B5EF4-FFF2-40B4-BE49-F238E27FC236}">
-                <a16:creationId xmlns:a16="http://schemas.microsoft.com/office/drawing/2014/main" id="{CF5B1076-5AC3-4C6A-A0F7-DC7FD79E2D51}"/>
+                <a16:creationId xmlns:a16="http://schemas.microsoft.com/office/drawing/2014/main" id="{4A9B8C5D-0673-4AAE-8619-8D9E5B02DC32}"/>
               </a:ext>
             </a:extLst>
           </p:cNvPr>
@@ -4307,7 +5662,7 @@
           <p:cNvPr id="4" name="">
             <a:extLst xmlns:a="http://schemas.openxmlformats.org/drawingml/2006/main">
               <a:ext uri="{FF2B5EF4-FFF2-40B4-BE49-F238E27FC236}">
-                <a16:creationId xmlns:a16="http://schemas.microsoft.com/office/drawing/2014/main" id="{F8E654DA-4E2E-4198-8C90-66C9DF944384}"/>
+                <a16:creationId xmlns:a16="http://schemas.microsoft.com/office/drawing/2014/main" id="{EF7FC878-86FB-48D7-9DC0-17F3F860040A}"/>
               </a:ext>
             </a:extLst>
           </p:cNvPr>
@@ -4342,7 +5697,7 @@
           <p:cNvPr id="5" name="">
             <a:extLst xmlns:a="http://schemas.openxmlformats.org/drawingml/2006/main">
               <a:ext uri="{FF2B5EF4-FFF2-40B4-BE49-F238E27FC236}">
-                <a16:creationId xmlns:a16="http://schemas.microsoft.com/office/drawing/2014/main" id="{579204C8-D0DA-4B1F-80F1-F11E60235CBA}"/>
+                <a16:creationId xmlns:a16="http://schemas.microsoft.com/office/drawing/2014/main" id="{024CF16C-850E-48FC-9331-ECA3872C71F6}"/>
               </a:ext>
             </a:extLst>
           </p:cNvPr>
@@ -4373,7 +5728,7 @@
           <p:cNvPr id="6" name="">
             <a:extLst xmlns:a="http://schemas.openxmlformats.org/drawingml/2006/main">
               <a:ext uri="{FF2B5EF4-FFF2-40B4-BE49-F238E27FC236}">
-                <a16:creationId xmlns:a16="http://schemas.microsoft.com/office/drawing/2014/main" id="{5D2A5268-B161-478C-A426-28D8AB918C44}"/>
+                <a16:creationId xmlns:a16="http://schemas.microsoft.com/office/drawing/2014/main" id="{18C3A475-802B-4555-A749-B2A461601F28}"/>
               </a:ext>
             </a:extLst>
           </p:cNvPr>
@@ -4429,7 +5784,7 @@
           <p:cNvPr id="7" name="">
             <a:extLst xmlns:a="http://schemas.openxmlformats.org/drawingml/2006/main">
               <a:ext uri="{FF2B5EF4-FFF2-40B4-BE49-F238E27FC236}">
-                <a16:creationId xmlns:a16="http://schemas.microsoft.com/office/drawing/2014/main" id="{29E02016-7A02-4BC6-9726-43EF302B40F4}"/>
+                <a16:creationId xmlns:a16="http://schemas.microsoft.com/office/drawing/2014/main" id="{B95CF67C-8625-45F4-B9E6-499327225F22}"/>
               </a:ext>
             </a:extLst>
           </p:cNvPr>
@@ -4485,7 +5840,7 @@
           <p:cNvPr id="8" name="">
             <a:extLst xmlns:a="http://schemas.openxmlformats.org/drawingml/2006/main">
               <a:ext uri="{FF2B5EF4-FFF2-40B4-BE49-F238E27FC236}">
-                <a16:creationId xmlns:a16="http://schemas.microsoft.com/office/drawing/2014/main" id="{212299C8-C67B-46EF-B72F-A3EAA6DBA5B4}"/>
+                <a16:creationId xmlns:a16="http://schemas.microsoft.com/office/drawing/2014/main" id="{2A7701A8-9372-48FD-A49E-23DDB9FECDE2}"/>
               </a:ext>
             </a:extLst>
           </p:cNvPr>
@@ -4541,7 +5896,7 @@
           <p:cNvPr id="9" name="">
             <a:extLst xmlns:a="http://schemas.openxmlformats.org/drawingml/2006/main">
               <a:ext uri="{FF2B5EF4-FFF2-40B4-BE49-F238E27FC236}">
-                <a16:creationId xmlns:a16="http://schemas.microsoft.com/office/drawing/2014/main" id="{43ABBFCC-AB58-4247-A75E-0A29006EA939}"/>
+                <a16:creationId xmlns:a16="http://schemas.microsoft.com/office/drawing/2014/main" id="{7632F6A4-1FBB-4952-8D79-545689082332}"/>
               </a:ext>
             </a:extLst>
           </p:cNvPr>
@@ -4576,7 +5931,7 @@
           <p:cNvPr id="10" name="">
             <a:extLst xmlns:a="http://schemas.openxmlformats.org/drawingml/2006/main">
               <a:ext uri="{FF2B5EF4-FFF2-40B4-BE49-F238E27FC236}">
-                <a16:creationId xmlns:a16="http://schemas.microsoft.com/office/drawing/2014/main" id="{803807EC-5AA4-42E1-B8C0-D6AE37B03B92}"/>
+                <a16:creationId xmlns:a16="http://schemas.microsoft.com/office/drawing/2014/main" id="{E2EFD09D-2B76-454A-A88A-EC520E2D7816}"/>
               </a:ext>
             </a:extLst>
           </p:cNvPr>
@@ -4607,7 +5962,7 @@
           <p:cNvPr id="11" name="">
             <a:extLst xmlns:a="http://schemas.openxmlformats.org/drawingml/2006/main">
               <a:ext uri="{FF2B5EF4-FFF2-40B4-BE49-F238E27FC236}">
-                <a16:creationId xmlns:a16="http://schemas.microsoft.com/office/drawing/2014/main" id="{7B457EDC-6986-40E2-989E-DA9FB25BEE4A}"/>
+                <a16:creationId xmlns:a16="http://schemas.microsoft.com/office/drawing/2014/main" id="{E1D497E0-49E5-4DE8-805F-5F5161020595}"/>
               </a:ext>
             </a:extLst>
           </p:cNvPr>
@@ -4663,7 +6018,7 @@
           <p:cNvPr id="12" name="">
             <a:extLst xmlns:a="http://schemas.openxmlformats.org/drawingml/2006/main">
               <a:ext uri="{FF2B5EF4-FFF2-40B4-BE49-F238E27FC236}">
-                <a16:creationId xmlns:a16="http://schemas.microsoft.com/office/drawing/2014/main" id="{43CC99FC-A303-42A2-A646-3295E241356E}"/>
+                <a16:creationId xmlns:a16="http://schemas.microsoft.com/office/drawing/2014/main" id="{0480B831-52F1-439C-AEA7-0A88821A8280}"/>
               </a:ext>
             </a:extLst>
           </p:cNvPr>
@@ -4719,7 +6074,7 @@
           <p:cNvPr id="13" name="">
             <a:extLst xmlns:a="http://schemas.openxmlformats.org/drawingml/2006/main">
               <a:ext uri="{FF2B5EF4-FFF2-40B4-BE49-F238E27FC236}">
-                <a16:creationId xmlns:a16="http://schemas.microsoft.com/office/drawing/2014/main" id="{79BFE376-51A8-4334-9694-C106E9EE238E}"/>
+                <a16:creationId xmlns:a16="http://schemas.microsoft.com/office/drawing/2014/main" id="{430BD741-2E72-41B2-83CB-7D5EDC16C96A}"/>
               </a:ext>
             </a:extLst>
           </p:cNvPr>
@@ -4775,7 +6130,7 @@
           <p:cNvPr id="14" name="">
             <a:extLst xmlns:a="http://schemas.openxmlformats.org/drawingml/2006/main">
               <a:ext uri="{FF2B5EF4-FFF2-40B4-BE49-F238E27FC236}">
-                <a16:creationId xmlns:a16="http://schemas.microsoft.com/office/drawing/2014/main" id="{A8D6F412-71DA-4C1A-9D15-257A80599BAC}"/>
+                <a16:creationId xmlns:a16="http://schemas.microsoft.com/office/drawing/2014/main" id="{0D47572B-9E3A-4C02-8014-3602A5F67B62}"/>
               </a:ext>
             </a:extLst>
           </p:cNvPr>
@@ -4810,7 +6165,7 @@
           <p:cNvPr id="15" name="">
             <a:extLst xmlns:a="http://schemas.openxmlformats.org/drawingml/2006/main">
               <a:ext uri="{FF2B5EF4-FFF2-40B4-BE49-F238E27FC236}">
-                <a16:creationId xmlns:a16="http://schemas.microsoft.com/office/drawing/2014/main" id="{B8A5D0D1-E52D-4E8F-A80A-6D61B6195991}"/>
+                <a16:creationId xmlns:a16="http://schemas.microsoft.com/office/drawing/2014/main" id="{D87D9EB6-F8FB-4613-A794-34432C459716}"/>
               </a:ext>
             </a:extLst>
           </p:cNvPr>
@@ -4841,7 +6196,7 @@
           <p:cNvPr id="16" name="">
             <a:extLst xmlns:a="http://schemas.openxmlformats.org/drawingml/2006/main">
               <a:ext uri="{FF2B5EF4-FFF2-40B4-BE49-F238E27FC236}">
-                <a16:creationId xmlns:a16="http://schemas.microsoft.com/office/drawing/2014/main" id="{6BE76E5E-2919-49FD-9FEC-F8B8CCB3738E}"/>
+                <a16:creationId xmlns:a16="http://schemas.microsoft.com/office/drawing/2014/main" id="{09954491-6A71-4683-B7D6-5A1C843B1CB2}"/>
               </a:ext>
             </a:extLst>
           </p:cNvPr>
@@ -4897,7 +6252,7 @@
           <p:cNvPr id="17" name="">
             <a:extLst xmlns:a="http://schemas.openxmlformats.org/drawingml/2006/main">
               <a:ext uri="{FF2B5EF4-FFF2-40B4-BE49-F238E27FC236}">
-                <a16:creationId xmlns:a16="http://schemas.microsoft.com/office/drawing/2014/main" id="{F84A3618-055E-4614-8DEE-DBC1D5509163}"/>
+                <a16:creationId xmlns:a16="http://schemas.microsoft.com/office/drawing/2014/main" id="{992959A2-E904-4C9D-BD84-3482BC70079E}"/>
               </a:ext>
             </a:extLst>
           </p:cNvPr>
@@ -4953,7 +6308,7 @@
           <p:cNvPr id="18" name="">
             <a:extLst xmlns:a="http://schemas.openxmlformats.org/drawingml/2006/main">
               <a:ext uri="{FF2B5EF4-FFF2-40B4-BE49-F238E27FC236}">
-                <a16:creationId xmlns:a16="http://schemas.microsoft.com/office/drawing/2014/main" id="{A9B81685-AB6B-4D48-BBD1-69BF416BEF7C}"/>
+                <a16:creationId xmlns:a16="http://schemas.microsoft.com/office/drawing/2014/main" id="{1D821DB5-0617-45FF-A925-9169A2EB1678}"/>
               </a:ext>
             </a:extLst>
           </p:cNvPr>
@@ -5009,7 +6364,7 @@
           <p:cNvPr id="19" name="">
             <a:extLst xmlns:a="http://schemas.openxmlformats.org/drawingml/2006/main">
               <a:ext uri="{FF2B5EF4-FFF2-40B4-BE49-F238E27FC236}">
-                <a16:creationId xmlns:a16="http://schemas.microsoft.com/office/drawing/2014/main" id="{ED05E8CD-8F4F-47F2-AED5-818860EA2518}"/>
+                <a16:creationId xmlns:a16="http://schemas.microsoft.com/office/drawing/2014/main" id="{D5C25297-1AE6-403B-A785-B36DB0EB9280}"/>
               </a:ext>
             </a:extLst>
           </p:cNvPr>
@@ -5044,7 +6399,7 @@
           <p:cNvPr id="20" name="">
             <a:extLst xmlns:a="http://schemas.openxmlformats.org/drawingml/2006/main">
               <a:ext uri="{FF2B5EF4-FFF2-40B4-BE49-F238E27FC236}">
-                <a16:creationId xmlns:a16="http://schemas.microsoft.com/office/drawing/2014/main" id="{CE651F70-4A45-4959-BEED-FEC83E0055CA}"/>
+                <a16:creationId xmlns:a16="http://schemas.microsoft.com/office/drawing/2014/main" id="{7FEEA9DE-1EC4-4966-B0B6-5FD19A5EE72B}"/>
               </a:ext>
             </a:extLst>
           </p:cNvPr>
@@ -5075,7 +6430,7 @@
           <p:cNvPr id="21" name="">
             <a:extLst xmlns:a="http://schemas.openxmlformats.org/drawingml/2006/main">
               <a:ext uri="{FF2B5EF4-FFF2-40B4-BE49-F238E27FC236}">
-                <a16:creationId xmlns:a16="http://schemas.microsoft.com/office/drawing/2014/main" id="{58416A15-06BC-4C18-AD93-EBF8F4362F34}"/>
+                <a16:creationId xmlns:a16="http://schemas.microsoft.com/office/drawing/2014/main" id="{578ACB79-94AE-47A7-AAC7-2B381CC84706}"/>
               </a:ext>
             </a:extLst>
           </p:cNvPr>
@@ -5131,7 +6486,7 @@
           <p:cNvPr id="22" name="">
             <a:extLst xmlns:a="http://schemas.openxmlformats.org/drawingml/2006/main">
               <a:ext uri="{FF2B5EF4-FFF2-40B4-BE49-F238E27FC236}">
-                <a16:creationId xmlns:a16="http://schemas.microsoft.com/office/drawing/2014/main" id="{1E951095-1E90-4CB8-8302-A1F73148637C}"/>
+                <a16:creationId xmlns:a16="http://schemas.microsoft.com/office/drawing/2014/main" id="{FAD8590C-C2BB-40EB-89EE-AB2F6688F682}"/>
               </a:ext>
             </a:extLst>
           </p:cNvPr>
@@ -5187,7 +6542,7 @@
           <p:cNvPr id="23" name="">
             <a:extLst xmlns:a="http://schemas.openxmlformats.org/drawingml/2006/main">
               <a:ext uri="{FF2B5EF4-FFF2-40B4-BE49-F238E27FC236}">
-                <a16:creationId xmlns:a16="http://schemas.microsoft.com/office/drawing/2014/main" id="{DDB52C94-D60E-4ED1-818F-4413250E81CD}"/>
+                <a16:creationId xmlns:a16="http://schemas.microsoft.com/office/drawing/2014/main" id="{C1DD5262-BEC5-4B49-9CEC-7520F43100E8}"/>
               </a:ext>
             </a:extLst>
           </p:cNvPr>
@@ -5243,7 +6598,7 @@
           <p:cNvPr id="24" name="">
             <a:extLst xmlns:a="http://schemas.openxmlformats.org/drawingml/2006/main">
               <a:ext uri="{FF2B5EF4-FFF2-40B4-BE49-F238E27FC236}">
-                <a16:creationId xmlns:a16="http://schemas.microsoft.com/office/drawing/2014/main" id="{C2A31E44-738A-4C0F-AF62-9A3A7F8BAC07}"/>
+                <a16:creationId xmlns:a16="http://schemas.microsoft.com/office/drawing/2014/main" id="{5AC91FC1-C0E3-4A1C-99B5-0E833CD962F7}"/>
               </a:ext>
             </a:extLst>
           </p:cNvPr>
@@ -5278,7 +6633,7 @@
           <p:cNvPr id="25" name="">
             <a:extLst xmlns:a="http://schemas.openxmlformats.org/drawingml/2006/main">
               <a:ext uri="{FF2B5EF4-FFF2-40B4-BE49-F238E27FC236}">
-                <a16:creationId xmlns:a16="http://schemas.microsoft.com/office/drawing/2014/main" id="{07266C19-320C-4FCC-8A22-596B54C39793}"/>
+                <a16:creationId xmlns:a16="http://schemas.microsoft.com/office/drawing/2014/main" id="{A86DFAC9-D912-48BE-B6A6-535B8F08195B}"/>
               </a:ext>
             </a:extLst>
           </p:cNvPr>
@@ -5309,7 +6664,7 @@
           <p:cNvPr id="26" name="">
             <a:extLst xmlns:a="http://schemas.openxmlformats.org/drawingml/2006/main">
               <a:ext uri="{FF2B5EF4-FFF2-40B4-BE49-F238E27FC236}">
-                <a16:creationId xmlns:a16="http://schemas.microsoft.com/office/drawing/2014/main" id="{F4F2CBAB-8F67-4A65-B42B-FA3700DB071A}"/>
+                <a16:creationId xmlns:a16="http://schemas.microsoft.com/office/drawing/2014/main" id="{F4BD3B70-98CC-4FBD-8242-69E38BAC7AFD}"/>
               </a:ext>
             </a:extLst>
           </p:cNvPr>
@@ -5365,7 +6720,7 @@
           <p:cNvPr id="27" name="">
             <a:extLst xmlns:a="http://schemas.openxmlformats.org/drawingml/2006/main">
               <a:ext uri="{FF2B5EF4-FFF2-40B4-BE49-F238E27FC236}">
-                <a16:creationId xmlns:a16="http://schemas.microsoft.com/office/drawing/2014/main" id="{E4036651-28F7-4B83-9FEF-E2166DF2A8C6}"/>
+                <a16:creationId xmlns:a16="http://schemas.microsoft.com/office/drawing/2014/main" id="{C78C102B-98EB-44A9-83AA-133B952B7C27}"/>
               </a:ext>
             </a:extLst>
           </p:cNvPr>
@@ -5421,7 +6776,7 @@
           <p:cNvPr id="28" name="">
             <a:extLst xmlns:a="http://schemas.openxmlformats.org/drawingml/2006/main">
               <a:ext uri="{FF2B5EF4-FFF2-40B4-BE49-F238E27FC236}">
-                <a16:creationId xmlns:a16="http://schemas.microsoft.com/office/drawing/2014/main" id="{4FCE9E27-5205-4FB8-9B54-DDC0B4C7C19F}"/>
+                <a16:creationId xmlns:a16="http://schemas.microsoft.com/office/drawing/2014/main" id="{3F9494FE-BABD-4948-ABF7-66678B62E656}"/>
               </a:ext>
             </a:extLst>
           </p:cNvPr>
@@ -5477,7 +6832,7 @@
           <p:cNvPr id="29" name="">
             <a:extLst xmlns:a="http://schemas.openxmlformats.org/drawingml/2006/main">
               <a:ext uri="{FF2B5EF4-FFF2-40B4-BE49-F238E27FC236}">
-                <a16:creationId xmlns:a16="http://schemas.microsoft.com/office/drawing/2014/main" id="{0AA0DB8D-6C5D-4B23-9A4C-E371BF9D9B03}"/>
+                <a16:creationId xmlns:a16="http://schemas.microsoft.com/office/drawing/2014/main" id="{8DF65FF7-6A87-45BA-95FC-CC33AEE26B08}"/>
               </a:ext>
             </a:extLst>
           </p:cNvPr>
@@ -5533,7 +6888,7 @@
           <p:cNvPr id="30" name="">
             <a:extLst xmlns:a="http://schemas.openxmlformats.org/drawingml/2006/main">
               <a:ext uri="{FF2B5EF4-FFF2-40B4-BE49-F238E27FC236}">
-                <a16:creationId xmlns:a16="http://schemas.microsoft.com/office/drawing/2014/main" id="{66359EB9-37DC-4F8F-811B-575D118C2A5D}"/>
+                <a16:creationId xmlns:a16="http://schemas.microsoft.com/office/drawing/2014/main" id="{C6D34DAA-ADEB-4BA7-96D9-B601B447A999}"/>
               </a:ext>
             </a:extLst>
           </p:cNvPr>
@@ -5587,7 +6942,7 @@
     </p:spTree>
     <p:extLst>
       <p:ext uri="{BB962C8B-B14F-4D97-AF65-F5344CB8AC3E}">
-        <p14:creationId xmlns:p14="http://schemas.microsoft.com/office/powerpoint/2010/main" val="724937713"/>
+        <p14:creationId xmlns:p14="http://schemas.microsoft.com/office/powerpoint/2010/main" val="308652326"/>
       </p:ext>
     </p:extLst>
   </p:cSld>
@@ -5618,7 +6973,7 @@
           <p:cNvPr id="1" name="">
             <a:extLst xmlns:a="http://schemas.openxmlformats.org/drawingml/2006/main">
               <a:ext uri="{FF2B5EF4-FFF2-40B4-BE49-F238E27FC236}">
-                <a16:creationId xmlns:a16="http://schemas.microsoft.com/office/drawing/2014/main" id="{34BE820C-D70C-4C95-9761-85461D602DA5}"/>
+                <a16:creationId xmlns:a16="http://schemas.microsoft.com/office/drawing/2014/main" id="{90F4F11F-1C8D-488C-8185-4BDB49AF4821}"/>
               </a:ext>
             </a:extLst>
           </p:cNvPr>
@@ -5674,7 +7029,7 @@
           <p:cNvPr id="2" name="">
             <a:extLst xmlns:a="http://schemas.openxmlformats.org/drawingml/2006/main">
               <a:ext uri="{FF2B5EF4-FFF2-40B4-BE49-F238E27FC236}">
-                <a16:creationId xmlns:a16="http://schemas.microsoft.com/office/drawing/2014/main" id="{E289102B-891C-42E2-A282-A16612E52BE6}"/>
+                <a16:creationId xmlns:a16="http://schemas.microsoft.com/office/drawing/2014/main" id="{E60079D0-7993-4852-8D77-5E5C1917F942}"/>
               </a:ext>
             </a:extLst>
           </p:cNvPr>
@@ -5730,7 +7085,7 @@
           <p:cNvPr id="3" name="">
             <a:extLst xmlns:a="http://schemas.openxmlformats.org/drawingml/2006/main">
               <a:ext uri="{FF2B5EF4-FFF2-40B4-BE49-F238E27FC236}">
-                <a16:creationId xmlns:a16="http://schemas.microsoft.com/office/drawing/2014/main" id="{BD197CC7-33FE-4893-A7F2-60453D6DA0E7}"/>
+                <a16:creationId xmlns:a16="http://schemas.microsoft.com/office/drawing/2014/main" id="{B02732F4-4A94-49FB-A386-C3A69826A0A1}"/>
               </a:ext>
             </a:extLst>
           </p:cNvPr>
@@ -5763,7 +7118,7 @@
           <p:cNvPr id="4" name="">
             <a:extLst xmlns:a="http://schemas.openxmlformats.org/drawingml/2006/main">
               <a:ext uri="{FF2B5EF4-FFF2-40B4-BE49-F238E27FC236}">
-                <a16:creationId xmlns:a16="http://schemas.microsoft.com/office/drawing/2014/main" id="{C50438FD-608D-4F72-BDC7-FF1223832254}"/>
+                <a16:creationId xmlns:a16="http://schemas.microsoft.com/office/drawing/2014/main" id="{3B90129E-1A53-47A0-B5C0-338945EF9FE4}"/>
               </a:ext>
             </a:extLst>
           </p:cNvPr>
@@ -5798,7 +7153,7 @@
           <p:cNvPr id="5" name="">
             <a:extLst xmlns:a="http://schemas.openxmlformats.org/drawingml/2006/main">
               <a:ext uri="{FF2B5EF4-FFF2-40B4-BE49-F238E27FC236}">
-                <a16:creationId xmlns:a16="http://schemas.microsoft.com/office/drawing/2014/main" id="{F3CFE228-82E5-44F1-9156-EB4998723ED5}"/>
+                <a16:creationId xmlns:a16="http://schemas.microsoft.com/office/drawing/2014/main" id="{0CB913AC-B683-4946-AA90-0A5A5E262062}"/>
               </a:ext>
             </a:extLst>
           </p:cNvPr>
@@ -5831,7 +7186,7 @@
           <p:cNvPr id="6" name="">
             <a:extLst xmlns:a="http://schemas.openxmlformats.org/drawingml/2006/main">
               <a:ext uri="{FF2B5EF4-FFF2-40B4-BE49-F238E27FC236}">
-                <a16:creationId xmlns:a16="http://schemas.microsoft.com/office/drawing/2014/main" id="{CB0B881B-5187-490D-B6BA-EAB7BA44242B}"/>
+                <a16:creationId xmlns:a16="http://schemas.microsoft.com/office/drawing/2014/main" id="{41098B28-C8F4-40D7-8F8B-F17A3610D254}"/>
               </a:ext>
             </a:extLst>
           </p:cNvPr>
@@ -5887,7 +7242,7 @@
           <p:cNvPr id="7" name="">
             <a:extLst xmlns:a="http://schemas.openxmlformats.org/drawingml/2006/main">
               <a:ext uri="{FF2B5EF4-FFF2-40B4-BE49-F238E27FC236}">
-                <a16:creationId xmlns:a16="http://schemas.microsoft.com/office/drawing/2014/main" id="{F250928A-2FD0-476F-99F3-D360D37468F9}"/>
+                <a16:creationId xmlns:a16="http://schemas.microsoft.com/office/drawing/2014/main" id="{82FCE0AA-B607-4CB8-8104-7D59C6BB5956}"/>
               </a:ext>
             </a:extLst>
           </p:cNvPr>
@@ -5966,7 +7321,7 @@
           <p:cNvPr id="8" name="">
             <a:extLst xmlns:a="http://schemas.openxmlformats.org/drawingml/2006/main">
               <a:ext uri="{FF2B5EF4-FFF2-40B4-BE49-F238E27FC236}">
-                <a16:creationId xmlns:a16="http://schemas.microsoft.com/office/drawing/2014/main" id="{252AB43A-A8EC-4536-A135-10E41A377AF8}"/>
+                <a16:creationId xmlns:a16="http://schemas.microsoft.com/office/drawing/2014/main" id="{04F738BE-0369-43DA-9439-F1DE7E782828}"/>
               </a:ext>
             </a:extLst>
           </p:cNvPr>
@@ -6022,7 +7377,7 @@
           <p:cNvPr id="9" name="">
             <a:extLst xmlns:a="http://schemas.openxmlformats.org/drawingml/2006/main">
               <a:ext uri="{FF2B5EF4-FFF2-40B4-BE49-F238E27FC236}">
-                <a16:creationId xmlns:a16="http://schemas.microsoft.com/office/drawing/2014/main" id="{37B78C63-35D1-4CD9-A2BD-51DE3833233F}"/>
+                <a16:creationId xmlns:a16="http://schemas.microsoft.com/office/drawing/2014/main" id="{F41A5357-2B31-46C9-BE25-4A31ED06851C}"/>
               </a:ext>
             </a:extLst>
           </p:cNvPr>
@@ -6057,7 +7412,7 @@
           <p:cNvPr id="10" name="">
             <a:extLst xmlns:a="http://schemas.openxmlformats.org/drawingml/2006/main">
               <a:ext uri="{FF2B5EF4-FFF2-40B4-BE49-F238E27FC236}">
-                <a16:creationId xmlns:a16="http://schemas.microsoft.com/office/drawing/2014/main" id="{FAF9643C-75F3-49C5-8F8C-D40DB27B4C7A}"/>
+                <a16:creationId xmlns:a16="http://schemas.microsoft.com/office/drawing/2014/main" id="{E703FBFA-96E8-48A6-8DF6-A561D7B2B59C}"/>
               </a:ext>
             </a:extLst>
           </p:cNvPr>
@@ -6090,7 +7445,7 @@
           <p:cNvPr id="11" name="">
             <a:extLst xmlns:a="http://schemas.openxmlformats.org/drawingml/2006/main">
               <a:ext uri="{FF2B5EF4-FFF2-40B4-BE49-F238E27FC236}">
-                <a16:creationId xmlns:a16="http://schemas.microsoft.com/office/drawing/2014/main" id="{E48A1BDD-F051-43CD-A94E-FBBA39994813}"/>
+                <a16:creationId xmlns:a16="http://schemas.microsoft.com/office/drawing/2014/main" id="{ED63D0B6-8303-4454-B090-4017849CA5E0}"/>
               </a:ext>
             </a:extLst>
           </p:cNvPr>
@@ -6146,7 +7501,7 @@
           <p:cNvPr id="12" name="">
             <a:extLst xmlns:a="http://schemas.openxmlformats.org/drawingml/2006/main">
               <a:ext uri="{FF2B5EF4-FFF2-40B4-BE49-F238E27FC236}">
-                <a16:creationId xmlns:a16="http://schemas.microsoft.com/office/drawing/2014/main" id="{2F711043-36B7-4E68-AC2B-3A3ABBC65815}"/>
+                <a16:creationId xmlns:a16="http://schemas.microsoft.com/office/drawing/2014/main" id="{9801EB0A-50CB-42DE-B24B-DD58C157F086}"/>
               </a:ext>
             </a:extLst>
           </p:cNvPr>
@@ -6202,7 +7557,7 @@
           <p:cNvPr id="13" name="">
             <a:extLst xmlns:a="http://schemas.openxmlformats.org/drawingml/2006/main">
               <a:ext uri="{FF2B5EF4-FFF2-40B4-BE49-F238E27FC236}">
-                <a16:creationId xmlns:a16="http://schemas.microsoft.com/office/drawing/2014/main" id="{90994243-D80C-40CF-8E10-D55E3FF0A70D}"/>
+                <a16:creationId xmlns:a16="http://schemas.microsoft.com/office/drawing/2014/main" id="{F5AB9AFE-0350-4850-8765-2228D8991E87}"/>
               </a:ext>
             </a:extLst>
           </p:cNvPr>
@@ -6258,7 +7613,7 @@
           <p:cNvPr id="14" name="">
             <a:extLst xmlns:a="http://schemas.openxmlformats.org/drawingml/2006/main">
               <a:ext uri="{FF2B5EF4-FFF2-40B4-BE49-F238E27FC236}">
-                <a16:creationId xmlns:a16="http://schemas.microsoft.com/office/drawing/2014/main" id="{D65CDC67-A0E8-4AE1-A73B-C1F34DACF1FF}"/>
+                <a16:creationId xmlns:a16="http://schemas.microsoft.com/office/drawing/2014/main" id="{02BEE584-FD3B-4CDB-9ED8-184159430A37}"/>
               </a:ext>
             </a:extLst>
           </p:cNvPr>
@@ -6293,7 +7648,7 @@
           <p:cNvPr id="15" name="">
             <a:extLst xmlns:a="http://schemas.openxmlformats.org/drawingml/2006/main">
               <a:ext uri="{FF2B5EF4-FFF2-40B4-BE49-F238E27FC236}">
-                <a16:creationId xmlns:a16="http://schemas.microsoft.com/office/drawing/2014/main" id="{3AA0A53A-3FE5-4F33-ABC4-5A1FAAE38495}"/>
+                <a16:creationId xmlns:a16="http://schemas.microsoft.com/office/drawing/2014/main" id="{578508A9-E59E-45F0-82A1-B0412A1BA5BE}"/>
               </a:ext>
             </a:extLst>
           </p:cNvPr>
@@ -6326,7 +7681,7 @@
           <p:cNvPr id="16" name="">
             <a:extLst xmlns:a="http://schemas.openxmlformats.org/drawingml/2006/main">
               <a:ext uri="{FF2B5EF4-FFF2-40B4-BE49-F238E27FC236}">
-                <a16:creationId xmlns:a16="http://schemas.microsoft.com/office/drawing/2014/main" id="{6733203B-A02B-4DF1-BF66-DAEF7D930634}"/>
+                <a16:creationId xmlns:a16="http://schemas.microsoft.com/office/drawing/2014/main" id="{6E972DD7-3673-471F-8839-7D40DB94C86D}"/>
               </a:ext>
             </a:extLst>
           </p:cNvPr>
@@ -6382,7 +7737,7 @@
           <p:cNvPr id="17" name="">
             <a:extLst xmlns:a="http://schemas.openxmlformats.org/drawingml/2006/main">
               <a:ext uri="{FF2B5EF4-FFF2-40B4-BE49-F238E27FC236}">
-                <a16:creationId xmlns:a16="http://schemas.microsoft.com/office/drawing/2014/main" id="{AA9E78D2-5EA4-45A4-A6E6-25CA8CA0FA85}"/>
+                <a16:creationId xmlns:a16="http://schemas.microsoft.com/office/drawing/2014/main" id="{6FA6FADB-A949-47B1-B11D-B8E9D0E29DD9}"/>
               </a:ext>
             </a:extLst>
           </p:cNvPr>
@@ -6461,7 +7816,7 @@
           <p:cNvPr id="18" name="">
             <a:extLst xmlns:a="http://schemas.openxmlformats.org/drawingml/2006/main">
               <a:ext uri="{FF2B5EF4-FFF2-40B4-BE49-F238E27FC236}">
-                <a16:creationId xmlns:a16="http://schemas.microsoft.com/office/drawing/2014/main" id="{47775059-C936-4539-90D2-64E42BB6F368}"/>
+                <a16:creationId xmlns:a16="http://schemas.microsoft.com/office/drawing/2014/main" id="{45415689-B3F3-447C-9FA0-26358613CE28}"/>
               </a:ext>
             </a:extLst>
           </p:cNvPr>
@@ -6517,7 +7872,7 @@
           <p:cNvPr id="19" name="">
             <a:extLst xmlns:a="http://schemas.openxmlformats.org/drawingml/2006/main">
               <a:ext uri="{FF2B5EF4-FFF2-40B4-BE49-F238E27FC236}">
-                <a16:creationId xmlns:a16="http://schemas.microsoft.com/office/drawing/2014/main" id="{B206D3BF-3AD4-42C8-BC8F-6492F36F6590}"/>
+                <a16:creationId xmlns:a16="http://schemas.microsoft.com/office/drawing/2014/main" id="{E9EAD4A3-7A6C-48A4-88FA-401FA21D9D8A}"/>
               </a:ext>
             </a:extLst>
           </p:cNvPr>
@@ -6573,7 +7928,7 @@
           <p:cNvPr id="20" name="">
             <a:extLst xmlns:a="http://schemas.openxmlformats.org/drawingml/2006/main">
               <a:ext uri="{FF2B5EF4-FFF2-40B4-BE49-F238E27FC236}">
-                <a16:creationId xmlns:a16="http://schemas.microsoft.com/office/drawing/2014/main" id="{5A562F6E-7291-4339-8FC7-E95CC0942100}"/>
+                <a16:creationId xmlns:a16="http://schemas.microsoft.com/office/drawing/2014/main" id="{32D3ECF3-CB11-4D44-8BD6-E1F8F8F9DF8A}"/>
               </a:ext>
             </a:extLst>
           </p:cNvPr>
@@ -6627,7 +7982,7 @@
     </p:spTree>
     <p:extLst>
       <p:ext uri="{BB962C8B-B14F-4D97-AF65-F5344CB8AC3E}">
-        <p14:creationId xmlns:p14="http://schemas.microsoft.com/office/powerpoint/2010/main" val="1191188308"/>
+        <p14:creationId xmlns:p14="http://schemas.microsoft.com/office/powerpoint/2010/main" val="1174093281"/>
       </p:ext>
     </p:extLst>
   </p:cSld>
@@ -6658,7 +8013,7 @@
           <p:cNvPr id="1" name="">
             <a:extLst xmlns:a="http://schemas.openxmlformats.org/drawingml/2006/main">
               <a:ext uri="{FF2B5EF4-FFF2-40B4-BE49-F238E27FC236}">
-                <a16:creationId xmlns:a16="http://schemas.microsoft.com/office/drawing/2014/main" id="{01A7310C-B073-4CAC-BF07-281C40D99904}"/>
+                <a16:creationId xmlns:a16="http://schemas.microsoft.com/office/drawing/2014/main" id="{6D0DA2E5-06D5-43CA-82BB-016896D18D64}"/>
               </a:ext>
             </a:extLst>
           </p:cNvPr>
@@ -6714,7 +8069,7 @@
           <p:cNvPr id="2" name="">
             <a:extLst xmlns:a="http://schemas.openxmlformats.org/drawingml/2006/main">
               <a:ext uri="{FF2B5EF4-FFF2-40B4-BE49-F238E27FC236}">
-                <a16:creationId xmlns:a16="http://schemas.microsoft.com/office/drawing/2014/main" id="{9727D9CD-B06F-4099-9023-D208C9D11544}"/>
+                <a16:creationId xmlns:a16="http://schemas.microsoft.com/office/drawing/2014/main" id="{C67C3157-3470-4169-B836-71A86D2C2255}"/>
               </a:ext>
             </a:extLst>
           </p:cNvPr>
@@ -6770,7 +8125,7 @@
           <p:cNvPr id="3" name="">
             <a:extLst xmlns:a="http://schemas.openxmlformats.org/drawingml/2006/main">
               <a:ext uri="{FF2B5EF4-FFF2-40B4-BE49-F238E27FC236}">
-                <a16:creationId xmlns:a16="http://schemas.microsoft.com/office/drawing/2014/main" id="{FA4903E3-3944-4ADA-805A-B96A290AF3A0}"/>
+                <a16:creationId xmlns:a16="http://schemas.microsoft.com/office/drawing/2014/main" id="{5933354D-2E49-418A-9A85-598D0C20EAAC}"/>
               </a:ext>
             </a:extLst>
           </p:cNvPr>
@@ -6803,7 +8158,7 @@
           <p:cNvPr id="4" name="">
             <a:extLst xmlns:a="http://schemas.openxmlformats.org/drawingml/2006/main">
               <a:ext uri="{FF2B5EF4-FFF2-40B4-BE49-F238E27FC236}">
-                <a16:creationId xmlns:a16="http://schemas.microsoft.com/office/drawing/2014/main" id="{8E578374-D6C1-4542-8DBC-7072F549A713}"/>
+                <a16:creationId xmlns:a16="http://schemas.microsoft.com/office/drawing/2014/main" id="{0AA4A7F5-D19C-4941-844E-EDFF88C78428}"/>
               </a:ext>
             </a:extLst>
           </p:cNvPr>
@@ -6838,7 +8193,7 @@
           <p:cNvPr id="5" name="">
             <a:extLst xmlns:a="http://schemas.openxmlformats.org/drawingml/2006/main">
               <a:ext uri="{FF2B5EF4-FFF2-40B4-BE49-F238E27FC236}">
-                <a16:creationId xmlns:a16="http://schemas.microsoft.com/office/drawing/2014/main" id="{FD96A074-3914-4BAD-AC89-EE2462250009}"/>
+                <a16:creationId xmlns:a16="http://schemas.microsoft.com/office/drawing/2014/main" id="{226F2F57-CCBE-4683-A2C3-454AEE51C213}"/>
               </a:ext>
             </a:extLst>
           </p:cNvPr>
@@ -6894,7 +8249,7 @@
           <p:cNvPr id="6" name="">
             <a:extLst xmlns:a="http://schemas.openxmlformats.org/drawingml/2006/main">
               <a:ext uri="{FF2B5EF4-FFF2-40B4-BE49-F238E27FC236}">
-                <a16:creationId xmlns:a16="http://schemas.microsoft.com/office/drawing/2014/main" id="{5D17D3A6-3B95-4DDF-A246-5BE1A25A4719}"/>
+                <a16:creationId xmlns:a16="http://schemas.microsoft.com/office/drawing/2014/main" id="{AE146098-2DE6-4CB8-805F-A54136BC7556}"/>
               </a:ext>
             </a:extLst>
           </p:cNvPr>
@@ -6950,7 +8305,7 @@
           <p:cNvPr id="7" name="">
             <a:extLst xmlns:a="http://schemas.openxmlformats.org/drawingml/2006/main">
               <a:ext uri="{FF2B5EF4-FFF2-40B4-BE49-F238E27FC236}">
-                <a16:creationId xmlns:a16="http://schemas.microsoft.com/office/drawing/2014/main" id="{4A46C456-C098-4878-820F-7AC267B39F29}"/>
+                <a16:creationId xmlns:a16="http://schemas.microsoft.com/office/drawing/2014/main" id="{57FFDF75-E7A8-4BE4-8BC5-B5505E70BF3C}"/>
               </a:ext>
             </a:extLst>
           </p:cNvPr>
@@ -6985,7 +8340,7 @@
           <p:cNvPr id="8" name="">
             <a:extLst xmlns:a="http://schemas.openxmlformats.org/drawingml/2006/main">
               <a:ext uri="{FF2B5EF4-FFF2-40B4-BE49-F238E27FC236}">
-                <a16:creationId xmlns:a16="http://schemas.microsoft.com/office/drawing/2014/main" id="{730D4E69-50AA-4DDA-9969-490D05B0E744}"/>
+                <a16:creationId xmlns:a16="http://schemas.microsoft.com/office/drawing/2014/main" id="{1A7EC4D1-DE8D-4FF2-81C1-B6B1DA32980E}"/>
               </a:ext>
             </a:extLst>
           </p:cNvPr>
@@ -7041,7 +8396,7 @@
           <p:cNvPr id="9" name="">
             <a:extLst xmlns:a="http://schemas.openxmlformats.org/drawingml/2006/main">
               <a:ext uri="{FF2B5EF4-FFF2-40B4-BE49-F238E27FC236}">
-                <a16:creationId xmlns:a16="http://schemas.microsoft.com/office/drawing/2014/main" id="{68CD7ED4-EA13-46B7-BE46-2DFCF268925A}"/>
+                <a16:creationId xmlns:a16="http://schemas.microsoft.com/office/drawing/2014/main" id="{D8B63AEC-308E-4239-B899-0362B0F45A23}"/>
               </a:ext>
             </a:extLst>
           </p:cNvPr>
@@ -7097,7 +8452,7 @@
           <p:cNvPr id="10" name="">
             <a:extLst xmlns:a="http://schemas.openxmlformats.org/drawingml/2006/main">
               <a:ext uri="{FF2B5EF4-FFF2-40B4-BE49-F238E27FC236}">
-                <a16:creationId xmlns:a16="http://schemas.microsoft.com/office/drawing/2014/main" id="{88AC40EF-273F-4CD0-A488-6E44536C9E30}"/>
+                <a16:creationId xmlns:a16="http://schemas.microsoft.com/office/drawing/2014/main" id="{4ED9EF94-BAD2-44C4-9876-49D72FEF3024}"/>
               </a:ext>
             </a:extLst>
           </p:cNvPr>
@@ -7132,7 +8487,7 @@
           <p:cNvPr id="11" name="">
             <a:extLst xmlns:a="http://schemas.openxmlformats.org/drawingml/2006/main">
               <a:ext uri="{FF2B5EF4-FFF2-40B4-BE49-F238E27FC236}">
-                <a16:creationId xmlns:a16="http://schemas.microsoft.com/office/drawing/2014/main" id="{56801B25-AA8C-4D72-930A-1C537EA0299A}"/>
+                <a16:creationId xmlns:a16="http://schemas.microsoft.com/office/drawing/2014/main" id="{91307563-FD51-4DB5-92E2-99ACFCC62FE8}"/>
               </a:ext>
             </a:extLst>
           </p:cNvPr>
@@ -7188,7 +8543,7 @@
           <p:cNvPr id="12" name="">
             <a:extLst xmlns:a="http://schemas.openxmlformats.org/drawingml/2006/main">
               <a:ext uri="{FF2B5EF4-FFF2-40B4-BE49-F238E27FC236}">
-                <a16:creationId xmlns:a16="http://schemas.microsoft.com/office/drawing/2014/main" id="{C5026647-0534-4E0A-ADC1-3857E379B247}"/>
+                <a16:creationId xmlns:a16="http://schemas.microsoft.com/office/drawing/2014/main" id="{2BC5BE73-B017-46CB-96F5-E1B3B67A95F0}"/>
               </a:ext>
             </a:extLst>
           </p:cNvPr>
@@ -7244,7 +8599,7 @@
           <p:cNvPr id="13" name="">
             <a:extLst xmlns:a="http://schemas.openxmlformats.org/drawingml/2006/main">
               <a:ext uri="{FF2B5EF4-FFF2-40B4-BE49-F238E27FC236}">
-                <a16:creationId xmlns:a16="http://schemas.microsoft.com/office/drawing/2014/main" id="{912F0EE2-AE11-44D7-9016-09B8783AED43}"/>
+                <a16:creationId xmlns:a16="http://schemas.microsoft.com/office/drawing/2014/main" id="{54568544-FDE9-44D2-A59B-36901809BBF2}"/>
               </a:ext>
             </a:extLst>
           </p:cNvPr>
@@ -7279,7 +8634,7 @@
           <p:cNvPr id="14" name="">
             <a:extLst xmlns:a="http://schemas.openxmlformats.org/drawingml/2006/main">
               <a:ext uri="{FF2B5EF4-FFF2-40B4-BE49-F238E27FC236}">
-                <a16:creationId xmlns:a16="http://schemas.microsoft.com/office/drawing/2014/main" id="{D6E985D5-173D-41DB-9216-432387EB1CBE}"/>
+                <a16:creationId xmlns:a16="http://schemas.microsoft.com/office/drawing/2014/main" id="{70D0DB37-0C6B-457D-A703-9C4FEC7C41BC}"/>
               </a:ext>
             </a:extLst>
           </p:cNvPr>
@@ -7335,7 +8690,7 @@
           <p:cNvPr id="15" name="">
             <a:extLst xmlns:a="http://schemas.openxmlformats.org/drawingml/2006/main">
               <a:ext uri="{FF2B5EF4-FFF2-40B4-BE49-F238E27FC236}">
-                <a16:creationId xmlns:a16="http://schemas.microsoft.com/office/drawing/2014/main" id="{54872C40-23B6-4496-8A35-BC105085CDF0}"/>
+                <a16:creationId xmlns:a16="http://schemas.microsoft.com/office/drawing/2014/main" id="{3B41B748-590A-41D1-8963-726FDF6C899B}"/>
               </a:ext>
             </a:extLst>
           </p:cNvPr>
@@ -7391,7 +8746,7 @@
           <p:cNvPr id="16" name="">
             <a:extLst xmlns:a="http://schemas.openxmlformats.org/drawingml/2006/main">
               <a:ext uri="{FF2B5EF4-FFF2-40B4-BE49-F238E27FC236}">
-                <a16:creationId xmlns:a16="http://schemas.microsoft.com/office/drawing/2014/main" id="{3B539679-11F8-4135-99B4-6C6621D8BD12}"/>
+                <a16:creationId xmlns:a16="http://schemas.microsoft.com/office/drawing/2014/main" id="{DB4B1653-54A2-4C59-9712-19A5961A6F6F}"/>
               </a:ext>
             </a:extLst>
           </p:cNvPr>
@@ -7426,7 +8781,7 @@
           <p:cNvPr id="17" name="">
             <a:extLst xmlns:a="http://schemas.openxmlformats.org/drawingml/2006/main">
               <a:ext uri="{FF2B5EF4-FFF2-40B4-BE49-F238E27FC236}">
-                <a16:creationId xmlns:a16="http://schemas.microsoft.com/office/drawing/2014/main" id="{17164EE2-0AC1-4A3A-B4AD-69D8B0CDE53D}"/>
+                <a16:creationId xmlns:a16="http://schemas.microsoft.com/office/drawing/2014/main" id="{96862D31-ED22-47C4-8C6E-07C09F53A426}"/>
               </a:ext>
             </a:extLst>
           </p:cNvPr>
@@ -7482,7 +8837,7 @@
           <p:cNvPr id="18" name="">
             <a:extLst xmlns:a="http://schemas.openxmlformats.org/drawingml/2006/main">
               <a:ext uri="{FF2B5EF4-FFF2-40B4-BE49-F238E27FC236}">
-                <a16:creationId xmlns:a16="http://schemas.microsoft.com/office/drawing/2014/main" id="{8A46A757-B148-401C-B078-B0E0B4EF07F0}"/>
+                <a16:creationId xmlns:a16="http://schemas.microsoft.com/office/drawing/2014/main" id="{4231C99B-3A4B-42DF-BADE-13F7F2AFAB2A}"/>
               </a:ext>
             </a:extLst>
           </p:cNvPr>
@@ -7538,7 +8893,7 @@
           <p:cNvPr id="19" name="">
             <a:extLst xmlns:a="http://schemas.openxmlformats.org/drawingml/2006/main">
               <a:ext uri="{FF2B5EF4-FFF2-40B4-BE49-F238E27FC236}">
-                <a16:creationId xmlns:a16="http://schemas.microsoft.com/office/drawing/2014/main" id="{D8D620FB-4D91-4C12-942E-ECD4D2740EE7}"/>
+                <a16:creationId xmlns:a16="http://schemas.microsoft.com/office/drawing/2014/main" id="{2DA522FA-DE71-4EB9-8C99-A17146E97844}"/>
               </a:ext>
             </a:extLst>
           </p:cNvPr>
@@ -7594,7 +8949,7 @@
           <p:cNvPr id="20" name="">
             <a:extLst xmlns:a="http://schemas.openxmlformats.org/drawingml/2006/main">
               <a:ext uri="{FF2B5EF4-FFF2-40B4-BE49-F238E27FC236}">
-                <a16:creationId xmlns:a16="http://schemas.microsoft.com/office/drawing/2014/main" id="{B0AA8A0F-7E8B-4935-AE45-FA95E1C17078}"/>
+                <a16:creationId xmlns:a16="http://schemas.microsoft.com/office/drawing/2014/main" id="{0357AA6C-DA7C-4803-ACC6-E8BE8DF14D96}"/>
               </a:ext>
             </a:extLst>
           </p:cNvPr>
@@ -7648,7 +9003,7 @@
     </p:spTree>
     <p:extLst>
       <p:ext uri="{BB962C8B-B14F-4D97-AF65-F5344CB8AC3E}">
-        <p14:creationId xmlns:p14="http://schemas.microsoft.com/office/powerpoint/2010/main" val="1659778076"/>
+        <p14:creationId xmlns:p14="http://schemas.microsoft.com/office/powerpoint/2010/main" val="1752780926"/>
       </p:ext>
     </p:extLst>
   </p:cSld>
@@ -7679,7 +9034,7 @@
           <p:cNvPr id="1" name="">
             <a:extLst xmlns:a="http://schemas.openxmlformats.org/drawingml/2006/main">
               <a:ext uri="{FF2B5EF4-FFF2-40B4-BE49-F238E27FC236}">
-                <a16:creationId xmlns:a16="http://schemas.microsoft.com/office/drawing/2014/main" id="{01E53645-CE8F-47B9-BDD6-C776E60C1CAF}"/>
+                <a16:creationId xmlns:a16="http://schemas.microsoft.com/office/drawing/2014/main" id="{AD17F4CE-7A01-4AEC-AD8B-799A242D4074}"/>
               </a:ext>
             </a:extLst>
           </p:cNvPr>
@@ -7735,7 +9090,7 @@
           <p:cNvPr id="2" name="">
             <a:extLst xmlns:a="http://schemas.openxmlformats.org/drawingml/2006/main">
               <a:ext uri="{FF2B5EF4-FFF2-40B4-BE49-F238E27FC236}">
-                <a16:creationId xmlns:a16="http://schemas.microsoft.com/office/drawing/2014/main" id="{A16F59A3-F3C2-4339-AC59-267A43BCC50E}"/>
+                <a16:creationId xmlns:a16="http://schemas.microsoft.com/office/drawing/2014/main" id="{CEAB3DF2-F25E-497C-A30F-4091A02D262E}"/>
               </a:ext>
             </a:extLst>
           </p:cNvPr>
@@ -7791,7 +9146,7 @@
           <p:cNvPr id="3" name="">
             <a:extLst xmlns:a="http://schemas.openxmlformats.org/drawingml/2006/main">
               <a:ext uri="{FF2B5EF4-FFF2-40B4-BE49-F238E27FC236}">
-                <a16:creationId xmlns:a16="http://schemas.microsoft.com/office/drawing/2014/main" id="{5E3777FF-96BF-424A-91A0-98B3D87D9758}"/>
+                <a16:creationId xmlns:a16="http://schemas.microsoft.com/office/drawing/2014/main" id="{C2CA0DDB-503E-4DF7-B44B-F0B287B12EFE}"/>
               </a:ext>
             </a:extLst>
           </p:cNvPr>
@@ -7824,7 +9179,7 @@
           <p:cNvPr id="4" name="">
             <a:extLst xmlns:a="http://schemas.openxmlformats.org/drawingml/2006/main">
               <a:ext uri="{FF2B5EF4-FFF2-40B4-BE49-F238E27FC236}">
-                <a16:creationId xmlns:a16="http://schemas.microsoft.com/office/drawing/2014/main" id="{2E459380-2CA5-4BA4-A115-B43E957A6A3E}"/>
+                <a16:creationId xmlns:a16="http://schemas.microsoft.com/office/drawing/2014/main" id="{791D9021-AB15-45CC-9773-9B5508B9DDB3}"/>
               </a:ext>
             </a:extLst>
           </p:cNvPr>
@@ -7859,7 +9214,7 @@
           <p:cNvPr id="5" name="">
             <a:extLst xmlns:a="http://schemas.openxmlformats.org/drawingml/2006/main">
               <a:ext uri="{FF2B5EF4-FFF2-40B4-BE49-F238E27FC236}">
-                <a16:creationId xmlns:a16="http://schemas.microsoft.com/office/drawing/2014/main" id="{AC59DDD1-5C73-4495-81A3-F282BC661D6B}"/>
+                <a16:creationId xmlns:a16="http://schemas.microsoft.com/office/drawing/2014/main" id="{31845DA3-31F4-4711-8D52-24D4796E0457}"/>
               </a:ext>
             </a:extLst>
           </p:cNvPr>
@@ -7915,7 +9270,7 @@
           <p:cNvPr id="6" name="">
             <a:extLst xmlns:a="http://schemas.openxmlformats.org/drawingml/2006/main">
               <a:ext uri="{FF2B5EF4-FFF2-40B4-BE49-F238E27FC236}">
-                <a16:creationId xmlns:a16="http://schemas.microsoft.com/office/drawing/2014/main" id="{08A9C8A0-3133-48EC-8E64-DF2F025D5335}"/>
+                <a16:creationId xmlns:a16="http://schemas.microsoft.com/office/drawing/2014/main" id="{B28CEAED-AA1F-4917-B853-7D098EB49F52}"/>
               </a:ext>
             </a:extLst>
           </p:cNvPr>
@@ -7971,7 +9326,7 @@
           <p:cNvPr id="7" name="">
             <a:extLst xmlns:a="http://schemas.openxmlformats.org/drawingml/2006/main">
               <a:ext uri="{FF2B5EF4-FFF2-40B4-BE49-F238E27FC236}">
-                <a16:creationId xmlns:a16="http://schemas.microsoft.com/office/drawing/2014/main" id="{1A03E0DE-BD01-495E-89BB-879963BB8EC3}"/>
+                <a16:creationId xmlns:a16="http://schemas.microsoft.com/office/drawing/2014/main" id="{5B37BD47-DD00-4278-ABD1-1D655E102A07}"/>
               </a:ext>
             </a:extLst>
           </p:cNvPr>
@@ -8006,7 +9361,7 @@
           <p:cNvPr id="8" name="">
             <a:extLst xmlns:a="http://schemas.openxmlformats.org/drawingml/2006/main">
               <a:ext uri="{FF2B5EF4-FFF2-40B4-BE49-F238E27FC236}">
-                <a16:creationId xmlns:a16="http://schemas.microsoft.com/office/drawing/2014/main" id="{B5CA2D4D-3781-436D-966F-E980CBD00528}"/>
+                <a16:creationId xmlns:a16="http://schemas.microsoft.com/office/drawing/2014/main" id="{1ADFC124-4128-44C6-B4A1-9D9ED7F215EB}"/>
               </a:ext>
             </a:extLst>
           </p:cNvPr>
@@ -8062,7 +9417,7 @@
           <p:cNvPr id="9" name="">
             <a:extLst xmlns:a="http://schemas.openxmlformats.org/drawingml/2006/main">
               <a:ext uri="{FF2B5EF4-FFF2-40B4-BE49-F238E27FC236}">
-                <a16:creationId xmlns:a16="http://schemas.microsoft.com/office/drawing/2014/main" id="{244C9F93-35F8-4C85-818C-7546F31AD0F7}"/>
+                <a16:creationId xmlns:a16="http://schemas.microsoft.com/office/drawing/2014/main" id="{D0250EC2-CF0E-4101-BB93-770310F92B32}"/>
               </a:ext>
             </a:extLst>
           </p:cNvPr>
@@ -8118,7 +9473,7 @@
           <p:cNvPr id="10" name="">
             <a:extLst xmlns:a="http://schemas.openxmlformats.org/drawingml/2006/main">
               <a:ext uri="{FF2B5EF4-FFF2-40B4-BE49-F238E27FC236}">
-                <a16:creationId xmlns:a16="http://schemas.microsoft.com/office/drawing/2014/main" id="{82AC81F7-6B97-49C4-96E5-893576073D7E}"/>
+                <a16:creationId xmlns:a16="http://schemas.microsoft.com/office/drawing/2014/main" id="{B6C035ED-65B0-4E78-8286-BEC8FF51C1F0}"/>
               </a:ext>
             </a:extLst>
           </p:cNvPr>
@@ -8153,7 +9508,7 @@
           <p:cNvPr id="11" name="">
             <a:extLst xmlns:a="http://schemas.openxmlformats.org/drawingml/2006/main">
               <a:ext uri="{FF2B5EF4-FFF2-40B4-BE49-F238E27FC236}">
-                <a16:creationId xmlns:a16="http://schemas.microsoft.com/office/drawing/2014/main" id="{9D63C87C-C146-4F83-88FF-9129C221CB4E}"/>
+                <a16:creationId xmlns:a16="http://schemas.microsoft.com/office/drawing/2014/main" id="{E90B6C2C-DFE7-422F-8D6D-EBB6E359038B}"/>
               </a:ext>
             </a:extLst>
           </p:cNvPr>
@@ -8209,7 +9564,7 @@
           <p:cNvPr id="12" name="">
             <a:extLst xmlns:a="http://schemas.openxmlformats.org/drawingml/2006/main">
               <a:ext uri="{FF2B5EF4-FFF2-40B4-BE49-F238E27FC236}">
-                <a16:creationId xmlns:a16="http://schemas.microsoft.com/office/drawing/2014/main" id="{3F66D39B-7E5D-45BC-9405-2866A177EFD8}"/>
+                <a16:creationId xmlns:a16="http://schemas.microsoft.com/office/drawing/2014/main" id="{4706D420-B546-4B16-9988-001B923CFD10}"/>
               </a:ext>
             </a:extLst>
           </p:cNvPr>
@@ -8265,7 +9620,7 @@
           <p:cNvPr id="13" name="">
             <a:extLst xmlns:a="http://schemas.openxmlformats.org/drawingml/2006/main">
               <a:ext uri="{FF2B5EF4-FFF2-40B4-BE49-F238E27FC236}">
-                <a16:creationId xmlns:a16="http://schemas.microsoft.com/office/drawing/2014/main" id="{E1643326-740D-47F1-A5F4-C53DDF16D90A}"/>
+                <a16:creationId xmlns:a16="http://schemas.microsoft.com/office/drawing/2014/main" id="{04DD706E-81FF-46E1-80C1-CD92C94EDDEB}"/>
               </a:ext>
             </a:extLst>
           </p:cNvPr>
@@ -8300,7 +9655,7 @@
           <p:cNvPr id="14" name="">
             <a:extLst xmlns:a="http://schemas.openxmlformats.org/drawingml/2006/main">
               <a:ext uri="{FF2B5EF4-FFF2-40B4-BE49-F238E27FC236}">
-                <a16:creationId xmlns:a16="http://schemas.microsoft.com/office/drawing/2014/main" id="{4836D4B7-C6C0-40E0-8BB7-D4A3BBEA4DC9}"/>
+                <a16:creationId xmlns:a16="http://schemas.microsoft.com/office/drawing/2014/main" id="{E39A92D9-1219-419D-8274-8335CCD04B9A}"/>
               </a:ext>
             </a:extLst>
           </p:cNvPr>
@@ -8356,7 +9711,7 @@
           <p:cNvPr id="15" name="">
             <a:extLst xmlns:a="http://schemas.openxmlformats.org/drawingml/2006/main">
               <a:ext uri="{FF2B5EF4-FFF2-40B4-BE49-F238E27FC236}">
-                <a16:creationId xmlns:a16="http://schemas.microsoft.com/office/drawing/2014/main" id="{9715BC07-E86E-49D7-BD91-B5DDA7ADFA97}"/>
+                <a16:creationId xmlns:a16="http://schemas.microsoft.com/office/drawing/2014/main" id="{4C3A8D13-A9EF-4CAC-BDB1-2CC82E9AB6D1}"/>
               </a:ext>
             </a:extLst>
           </p:cNvPr>
@@ -8412,7 +9767,7 @@
           <p:cNvPr id="16" name="">
             <a:extLst xmlns:a="http://schemas.openxmlformats.org/drawingml/2006/main">
               <a:ext uri="{FF2B5EF4-FFF2-40B4-BE49-F238E27FC236}">
-                <a16:creationId xmlns:a16="http://schemas.microsoft.com/office/drawing/2014/main" id="{7D9EE6DF-D534-425A-9A20-1ABED5DBFAA4}"/>
+                <a16:creationId xmlns:a16="http://schemas.microsoft.com/office/drawing/2014/main" id="{8FF8A52E-0C04-488D-907A-5AEB27438473}"/>
               </a:ext>
             </a:extLst>
           </p:cNvPr>
@@ -8468,7 +9823,7 @@
           <p:cNvPr id="17" name="">
             <a:extLst xmlns:a="http://schemas.openxmlformats.org/drawingml/2006/main">
               <a:ext uri="{FF2B5EF4-FFF2-40B4-BE49-F238E27FC236}">
-                <a16:creationId xmlns:a16="http://schemas.microsoft.com/office/drawing/2014/main" id="{F9A968B9-B9EC-42CA-ACA4-17F59C3B6A9F}"/>
+                <a16:creationId xmlns:a16="http://schemas.microsoft.com/office/drawing/2014/main" id="{75004D69-84D5-47B7-8DC8-D070BC9F0230}"/>
               </a:ext>
             </a:extLst>
           </p:cNvPr>
@@ -8501,7 +9856,7 @@
           <p:cNvPr id="18" name="">
             <a:extLst xmlns:a="http://schemas.openxmlformats.org/drawingml/2006/main">
               <a:ext uri="{FF2B5EF4-FFF2-40B4-BE49-F238E27FC236}">
-                <a16:creationId xmlns:a16="http://schemas.microsoft.com/office/drawing/2014/main" id="{69090E09-D60C-411F-A579-EB840C05BAEA}"/>
+                <a16:creationId xmlns:a16="http://schemas.microsoft.com/office/drawing/2014/main" id="{D3323CD4-19B7-4E92-AF2B-5DB950E63AFF}"/>
               </a:ext>
             </a:extLst>
           </p:cNvPr>
@@ -8557,7 +9912,7 @@
           <p:cNvPr id="19" name="">
             <a:extLst xmlns:a="http://schemas.openxmlformats.org/drawingml/2006/main">
               <a:ext uri="{FF2B5EF4-FFF2-40B4-BE49-F238E27FC236}">
-                <a16:creationId xmlns:a16="http://schemas.microsoft.com/office/drawing/2014/main" id="{08AF3C75-C1E6-4377-AB13-CF4E70A84052}"/>
+                <a16:creationId xmlns:a16="http://schemas.microsoft.com/office/drawing/2014/main" id="{36EFE2BC-70C1-411F-BC4A-3D942BCF843C}"/>
               </a:ext>
             </a:extLst>
           </p:cNvPr>
@@ -8590,7 +9945,7 @@
           <p:cNvPr id="20" name="">
             <a:extLst xmlns:a="http://schemas.openxmlformats.org/drawingml/2006/main">
               <a:ext uri="{FF2B5EF4-FFF2-40B4-BE49-F238E27FC236}">
-                <a16:creationId xmlns:a16="http://schemas.microsoft.com/office/drawing/2014/main" id="{DC4E4411-E146-4B55-B599-D53FC4331743}"/>
+                <a16:creationId xmlns:a16="http://schemas.microsoft.com/office/drawing/2014/main" id="{7E180650-6A39-4BC3-9490-A1DEBA462E28}"/>
               </a:ext>
             </a:extLst>
           </p:cNvPr>
@@ -8646,7 +10001,7 @@
           <p:cNvPr id="21" name="">
             <a:extLst xmlns:a="http://schemas.openxmlformats.org/drawingml/2006/main">
               <a:ext uri="{FF2B5EF4-FFF2-40B4-BE49-F238E27FC236}">
-                <a16:creationId xmlns:a16="http://schemas.microsoft.com/office/drawing/2014/main" id="{53968391-642F-460A-A303-7F6DB8095EDE}"/>
+                <a16:creationId xmlns:a16="http://schemas.microsoft.com/office/drawing/2014/main" id="{0AA6F818-4661-447E-A684-6B083202130C}"/>
               </a:ext>
             </a:extLst>
           </p:cNvPr>
@@ -8679,7 +10034,7 @@
           <p:cNvPr id="22" name="">
             <a:extLst xmlns:a="http://schemas.openxmlformats.org/drawingml/2006/main">
               <a:ext uri="{FF2B5EF4-FFF2-40B4-BE49-F238E27FC236}">
-                <a16:creationId xmlns:a16="http://schemas.microsoft.com/office/drawing/2014/main" id="{93018940-3285-4981-B55A-9A4C3C14D1E4}"/>
+                <a16:creationId xmlns:a16="http://schemas.microsoft.com/office/drawing/2014/main" id="{813CD12B-F570-4E7F-B0A9-B335BA5F507A}"/>
               </a:ext>
             </a:extLst>
           </p:cNvPr>
@@ -8739,7 +10094,7 @@
           <p:nvPr/>
         </p:nvPicPr>
         <p:blipFill>
-          <a:blip xmlns:r="http://schemas.openxmlformats.org/officeDocument/2006/relationships" xmlns:a="http://schemas.openxmlformats.org/drawingml/2006/main" r:embed="R2dcf4e08ce0e4eef"/>
+          <a:blip xmlns:r="http://schemas.openxmlformats.org/officeDocument/2006/relationships" xmlns:a="http://schemas.openxmlformats.org/drawingml/2006/main" r:embed="Rbdf6efe31dd04311"/>
           <a:stretch xmlns:a="http://schemas.openxmlformats.org/drawingml/2006/main"/>
         </p:blipFill>
         <p:spPr>
@@ -8757,7 +10112,7 @@
           <p:cNvPr id="24" name="">
             <a:extLst xmlns:a="http://schemas.openxmlformats.org/drawingml/2006/main">
               <a:ext uri="{FF2B5EF4-FFF2-40B4-BE49-F238E27FC236}">
-                <a16:creationId xmlns:a16="http://schemas.microsoft.com/office/drawing/2014/main" id="{E8BA7BC3-803A-453F-8B9B-CABE98A9AE12}"/>
+                <a16:creationId xmlns:a16="http://schemas.microsoft.com/office/drawing/2014/main" id="{4BF3D33D-1F03-4D75-9D51-3778646819B4}"/>
               </a:ext>
             </a:extLst>
           </p:cNvPr>
@@ -8813,7 +10168,7 @@
           <p:cNvPr id="25" name="">
             <a:extLst xmlns:a="http://schemas.openxmlformats.org/drawingml/2006/main">
               <a:ext uri="{FF2B5EF4-FFF2-40B4-BE49-F238E27FC236}">
-                <a16:creationId xmlns:a16="http://schemas.microsoft.com/office/drawing/2014/main" id="{66BDD941-E7CF-4E9F-9696-60184A0B1B12}"/>
+                <a16:creationId xmlns:a16="http://schemas.microsoft.com/office/drawing/2014/main" id="{E6372CC0-9977-4890-A1D4-4099BBACAD2D}"/>
               </a:ext>
             </a:extLst>
           </p:cNvPr>
@@ -8867,7 +10222,7 @@
     </p:spTree>
     <p:extLst>
       <p:ext uri="{BB962C8B-B14F-4D97-AF65-F5344CB8AC3E}">
-        <p14:creationId xmlns:p14="http://schemas.microsoft.com/office/powerpoint/2010/main" val="761027601"/>
+        <p14:creationId xmlns:p14="http://schemas.microsoft.com/office/powerpoint/2010/main" val="14740314"/>
       </p:ext>
     </p:extLst>
   </p:cSld>
@@ -8898,7 +10253,7 @@
           <p:cNvPr id="1" name="">
             <a:extLst xmlns:a="http://schemas.openxmlformats.org/drawingml/2006/main">
               <a:ext uri="{FF2B5EF4-FFF2-40B4-BE49-F238E27FC236}">
-                <a16:creationId xmlns:a16="http://schemas.microsoft.com/office/drawing/2014/main" id="{CCB2B730-F32F-4F12-8A8C-B8BD986ECBA1}"/>
+                <a16:creationId xmlns:a16="http://schemas.microsoft.com/office/drawing/2014/main" id="{B109D33B-B601-46B9-B8A5-AD0D407EAB8B}"/>
               </a:ext>
             </a:extLst>
           </p:cNvPr>
@@ -8954,7 +10309,7 @@
           <p:cNvPr id="2" name="">
             <a:extLst xmlns:a="http://schemas.openxmlformats.org/drawingml/2006/main">
               <a:ext uri="{FF2B5EF4-FFF2-40B4-BE49-F238E27FC236}">
-                <a16:creationId xmlns:a16="http://schemas.microsoft.com/office/drawing/2014/main" id="{67E21410-66E9-4CDC-A0EE-98199E639B77}"/>
+                <a16:creationId xmlns:a16="http://schemas.microsoft.com/office/drawing/2014/main" id="{2A2FC2E9-DE9E-45D8-B1B4-2B5DEC6222BC}"/>
               </a:ext>
             </a:extLst>
           </p:cNvPr>
@@ -9010,7 +10365,7 @@
           <p:cNvPr id="3" name="">
             <a:extLst xmlns:a="http://schemas.openxmlformats.org/drawingml/2006/main">
               <a:ext uri="{FF2B5EF4-FFF2-40B4-BE49-F238E27FC236}">
-                <a16:creationId xmlns:a16="http://schemas.microsoft.com/office/drawing/2014/main" id="{36D79EDB-4E06-42DA-8D72-F58DD76607CB}"/>
+                <a16:creationId xmlns:a16="http://schemas.microsoft.com/office/drawing/2014/main" id="{C9679C2D-082D-4A09-8868-2EC52FF22CEC}"/>
               </a:ext>
             </a:extLst>
           </p:cNvPr>
@@ -9043,7 +10398,7 @@
           <p:cNvPr id="4" name="">
             <a:extLst xmlns:a="http://schemas.openxmlformats.org/drawingml/2006/main">
               <a:ext uri="{FF2B5EF4-FFF2-40B4-BE49-F238E27FC236}">
-                <a16:creationId xmlns:a16="http://schemas.microsoft.com/office/drawing/2014/main" id="{12AA5D56-7794-41E0-A2E9-01EB44D5F11D}"/>
+                <a16:creationId xmlns:a16="http://schemas.microsoft.com/office/drawing/2014/main" id="{7BFD389F-22C3-45E5-8861-C983F7E54074}"/>
               </a:ext>
             </a:extLst>
           </p:cNvPr>
@@ -9078,7 +10433,7 @@
           <p:cNvPr id="5" name="">
             <a:extLst xmlns:a="http://schemas.openxmlformats.org/drawingml/2006/main">
               <a:ext uri="{FF2B5EF4-FFF2-40B4-BE49-F238E27FC236}">
-                <a16:creationId xmlns:a16="http://schemas.microsoft.com/office/drawing/2014/main" id="{7EF5055A-1335-458E-B0CF-FB7914BEA672}"/>
+                <a16:creationId xmlns:a16="http://schemas.microsoft.com/office/drawing/2014/main" id="{E9B0C0D5-1465-46AB-A6AD-EA8626CEE4F0}"/>
               </a:ext>
             </a:extLst>
           </p:cNvPr>
@@ -9111,7 +10466,7 @@
           <p:cNvPr id="6" name="">
             <a:extLst xmlns:a="http://schemas.openxmlformats.org/drawingml/2006/main">
               <a:ext uri="{FF2B5EF4-FFF2-40B4-BE49-F238E27FC236}">
-                <a16:creationId xmlns:a16="http://schemas.microsoft.com/office/drawing/2014/main" id="{C778C48B-4E5D-4C2C-B4F4-2A8A88686BBF}"/>
+                <a16:creationId xmlns:a16="http://schemas.microsoft.com/office/drawing/2014/main" id="{C058163B-485D-4A90-B677-6ACCFCBCADD7}"/>
               </a:ext>
             </a:extLst>
           </p:cNvPr>
@@ -9167,7 +10522,7 @@
           <p:cNvPr id="7" name="">
             <a:extLst xmlns:a="http://schemas.openxmlformats.org/drawingml/2006/main">
               <a:ext uri="{FF2B5EF4-FFF2-40B4-BE49-F238E27FC236}">
-                <a16:creationId xmlns:a16="http://schemas.microsoft.com/office/drawing/2014/main" id="{38EB41E4-CB96-4A42-8DB3-EDCFDDD65BC9}"/>
+                <a16:creationId xmlns:a16="http://schemas.microsoft.com/office/drawing/2014/main" id="{9006EF7F-0B3D-4CDA-938B-6ED47E6DA5FA}"/>
               </a:ext>
             </a:extLst>
           </p:cNvPr>
@@ -9223,7 +10578,7 @@
           <p:cNvPr id="8" name="">
             <a:extLst xmlns:a="http://schemas.openxmlformats.org/drawingml/2006/main">
               <a:ext uri="{FF2B5EF4-FFF2-40B4-BE49-F238E27FC236}">
-                <a16:creationId xmlns:a16="http://schemas.microsoft.com/office/drawing/2014/main" id="{981A5A82-2F98-4516-961D-FDF62452081F}"/>
+                <a16:creationId xmlns:a16="http://schemas.microsoft.com/office/drawing/2014/main" id="{35068A4D-A1B1-4FAB-B602-1E85ABCB888C}"/>
               </a:ext>
             </a:extLst>
           </p:cNvPr>
@@ -9258,7 +10613,7 @@
           <p:cNvPr id="9" name="">
             <a:extLst xmlns:a="http://schemas.openxmlformats.org/drawingml/2006/main">
               <a:ext uri="{FF2B5EF4-FFF2-40B4-BE49-F238E27FC236}">
-                <a16:creationId xmlns:a16="http://schemas.microsoft.com/office/drawing/2014/main" id="{A168ACFC-27D8-4CD0-9F00-C6C3FBD6131B}"/>
+                <a16:creationId xmlns:a16="http://schemas.microsoft.com/office/drawing/2014/main" id="{A8821E7A-6281-4B1A-ABC0-7910497B0512}"/>
               </a:ext>
             </a:extLst>
           </p:cNvPr>
@@ -9291,7 +10646,7 @@
           <p:cNvPr id="10" name="">
             <a:extLst xmlns:a="http://schemas.openxmlformats.org/drawingml/2006/main">
               <a:ext uri="{FF2B5EF4-FFF2-40B4-BE49-F238E27FC236}">
-                <a16:creationId xmlns:a16="http://schemas.microsoft.com/office/drawing/2014/main" id="{AC044F99-C82C-4A32-B03C-D7573E311903}"/>
+                <a16:creationId xmlns:a16="http://schemas.microsoft.com/office/drawing/2014/main" id="{A2C8CF8D-ED4A-4538-B9E1-D08F5E04A89C}"/>
               </a:ext>
             </a:extLst>
           </p:cNvPr>
@@ -9347,7 +10702,7 @@
           <p:cNvPr id="11" name="">
             <a:extLst xmlns:a="http://schemas.openxmlformats.org/drawingml/2006/main">
               <a:ext uri="{FF2B5EF4-FFF2-40B4-BE49-F238E27FC236}">
-                <a16:creationId xmlns:a16="http://schemas.microsoft.com/office/drawing/2014/main" id="{E55ABA59-982A-4ED9-8D26-52C798B7EDA5}"/>
+                <a16:creationId xmlns:a16="http://schemas.microsoft.com/office/drawing/2014/main" id="{55756B11-40DE-4273-8DFD-D21BDF609D74}"/>
               </a:ext>
             </a:extLst>
           </p:cNvPr>
@@ -9403,7 +10758,7 @@
           <p:cNvPr id="12" name="">
             <a:extLst xmlns:a="http://schemas.openxmlformats.org/drawingml/2006/main">
               <a:ext uri="{FF2B5EF4-FFF2-40B4-BE49-F238E27FC236}">
-                <a16:creationId xmlns:a16="http://schemas.microsoft.com/office/drawing/2014/main" id="{CC616B67-314F-4265-AE52-27592517DB0D}"/>
+                <a16:creationId xmlns:a16="http://schemas.microsoft.com/office/drawing/2014/main" id="{7B39D319-CEB7-45FD-B75A-43E132168773}"/>
               </a:ext>
             </a:extLst>
           </p:cNvPr>
@@ -9438,7 +10793,7 @@
           <p:cNvPr id="13" name="">
             <a:extLst xmlns:a="http://schemas.openxmlformats.org/drawingml/2006/main">
               <a:ext uri="{FF2B5EF4-FFF2-40B4-BE49-F238E27FC236}">
-                <a16:creationId xmlns:a16="http://schemas.microsoft.com/office/drawing/2014/main" id="{AD905C86-2037-41F0-8635-98E208D92459}"/>
+                <a16:creationId xmlns:a16="http://schemas.microsoft.com/office/drawing/2014/main" id="{9281E8D1-20EE-4C56-BCCA-840651E4888C}"/>
               </a:ext>
             </a:extLst>
           </p:cNvPr>
@@ -9471,7 +10826,7 @@
           <p:cNvPr id="14" name="">
             <a:extLst xmlns:a="http://schemas.openxmlformats.org/drawingml/2006/main">
               <a:ext uri="{FF2B5EF4-FFF2-40B4-BE49-F238E27FC236}">
-                <a16:creationId xmlns:a16="http://schemas.microsoft.com/office/drawing/2014/main" id="{C4AEACA9-623A-43EF-BEDC-D445B7F07D46}"/>
+                <a16:creationId xmlns:a16="http://schemas.microsoft.com/office/drawing/2014/main" id="{C67928C0-C8BF-4C25-85D9-E064FFB1C956}"/>
               </a:ext>
             </a:extLst>
           </p:cNvPr>
@@ -9527,7 +10882,7 @@
           <p:cNvPr id="15" name="">
             <a:extLst xmlns:a="http://schemas.openxmlformats.org/drawingml/2006/main">
               <a:ext uri="{FF2B5EF4-FFF2-40B4-BE49-F238E27FC236}">
-                <a16:creationId xmlns:a16="http://schemas.microsoft.com/office/drawing/2014/main" id="{0C704A9D-F229-4AD5-8ACF-23CC915BD7FD}"/>
+                <a16:creationId xmlns:a16="http://schemas.microsoft.com/office/drawing/2014/main" id="{00D26735-3625-4831-ACDA-8A931D9903CD}"/>
               </a:ext>
             </a:extLst>
           </p:cNvPr>
@@ -9587,7 +10942,7 @@
           <p:nvPr/>
         </p:nvPicPr>
         <p:blipFill>
-          <a:blip xmlns:r="http://schemas.openxmlformats.org/officeDocument/2006/relationships" xmlns:a="http://schemas.openxmlformats.org/drawingml/2006/main" r:embed="Rfa7467da4df54caa"/>
+          <a:blip xmlns:r="http://schemas.openxmlformats.org/officeDocument/2006/relationships" xmlns:a="http://schemas.openxmlformats.org/drawingml/2006/main" r:embed="Rf9f3880245634cea"/>
           <a:stretch xmlns:a="http://schemas.openxmlformats.org/drawingml/2006/main"/>
         </p:blipFill>
         <p:spPr>
@@ -9605,7 +10960,7 @@
           <p:cNvPr id="17" name="">
             <a:extLst xmlns:a="http://schemas.openxmlformats.org/drawingml/2006/main">
               <a:ext uri="{FF2B5EF4-FFF2-40B4-BE49-F238E27FC236}">
-                <a16:creationId xmlns:a16="http://schemas.microsoft.com/office/drawing/2014/main" id="{39D25A68-2061-4CA6-B687-B4716A0DE5F5}"/>
+                <a16:creationId xmlns:a16="http://schemas.microsoft.com/office/drawing/2014/main" id="{3D35DEE9-EF3C-4AA6-BBD7-E896BE2EFA8D}"/>
               </a:ext>
             </a:extLst>
           </p:cNvPr>
@@ -9661,7 +11016,7 @@
           <p:cNvPr id="18" name="">
             <a:extLst xmlns:a="http://schemas.openxmlformats.org/drawingml/2006/main">
               <a:ext uri="{FF2B5EF4-FFF2-40B4-BE49-F238E27FC236}">
-                <a16:creationId xmlns:a16="http://schemas.microsoft.com/office/drawing/2014/main" id="{99626594-F1EB-4C0F-B81F-A5BB8359BE39}"/>
+                <a16:creationId xmlns:a16="http://schemas.microsoft.com/office/drawing/2014/main" id="{222A4ADA-563B-4DF7-AAA8-9EEFFEA3646B}"/>
               </a:ext>
             </a:extLst>
           </p:cNvPr>
@@ -9715,7 +11070,7 @@
     </p:spTree>
     <p:extLst>
       <p:ext uri="{BB962C8B-B14F-4D97-AF65-F5344CB8AC3E}">
-        <p14:creationId xmlns:p14="http://schemas.microsoft.com/office/powerpoint/2010/main" val="936517872"/>
+        <p14:creationId xmlns:p14="http://schemas.microsoft.com/office/powerpoint/2010/main" val="1808840453"/>
       </p:ext>
     </p:extLst>
   </p:cSld>
@@ -9746,7 +11101,7 @@
           <p:cNvPr id="1" name="">
             <a:extLst xmlns:a="http://schemas.openxmlformats.org/drawingml/2006/main">
               <a:ext uri="{FF2B5EF4-FFF2-40B4-BE49-F238E27FC236}">
-                <a16:creationId xmlns:a16="http://schemas.microsoft.com/office/drawing/2014/main" id="{76E81043-8E74-4AF1-A3FF-DDCBABA5FEBD}"/>
+                <a16:creationId xmlns:a16="http://schemas.microsoft.com/office/drawing/2014/main" id="{1F09E7C6-F14F-4286-A314-212521DBDB9F}"/>
               </a:ext>
             </a:extLst>
           </p:cNvPr>
@@ -9802,7 +11157,7 @@
           <p:cNvPr id="2" name="">
             <a:extLst xmlns:a="http://schemas.openxmlformats.org/drawingml/2006/main">
               <a:ext uri="{FF2B5EF4-FFF2-40B4-BE49-F238E27FC236}">
-                <a16:creationId xmlns:a16="http://schemas.microsoft.com/office/drawing/2014/main" id="{7D775E07-ABFA-461D-BB20-967EDEA2454C}"/>
+                <a16:creationId xmlns:a16="http://schemas.microsoft.com/office/drawing/2014/main" id="{38470162-AC0B-49DB-A361-E5DA8E815628}"/>
               </a:ext>
             </a:extLst>
           </p:cNvPr>
@@ -9858,7 +11213,7 @@
           <p:cNvPr id="3" name="">
             <a:extLst xmlns:a="http://schemas.openxmlformats.org/drawingml/2006/main">
               <a:ext uri="{FF2B5EF4-FFF2-40B4-BE49-F238E27FC236}">
-                <a16:creationId xmlns:a16="http://schemas.microsoft.com/office/drawing/2014/main" id="{77E1888A-9739-4740-AA09-6535C973AE4E}"/>
+                <a16:creationId xmlns:a16="http://schemas.microsoft.com/office/drawing/2014/main" id="{F98F5590-3EF0-4431-BD81-8EBDF07D61C9}"/>
               </a:ext>
             </a:extLst>
           </p:cNvPr>
@@ -9891,7 +11246,7 @@
           <p:cNvPr id="4" name="">
             <a:extLst xmlns:a="http://schemas.openxmlformats.org/drawingml/2006/main">
               <a:ext uri="{FF2B5EF4-FFF2-40B4-BE49-F238E27FC236}">
-                <a16:creationId xmlns:a16="http://schemas.microsoft.com/office/drawing/2014/main" id="{D5CA8E84-49E2-4614-961D-75C72844F49C}"/>
+                <a16:creationId xmlns:a16="http://schemas.microsoft.com/office/drawing/2014/main" id="{683D9B5E-59C0-4380-9390-3030F93C1692}"/>
               </a:ext>
             </a:extLst>
           </p:cNvPr>
@@ -9926,7 +11281,7 @@
           <p:cNvPr id="5" name="">
             <a:extLst xmlns:a="http://schemas.openxmlformats.org/drawingml/2006/main">
               <a:ext uri="{FF2B5EF4-FFF2-40B4-BE49-F238E27FC236}">
-                <a16:creationId xmlns:a16="http://schemas.microsoft.com/office/drawing/2014/main" id="{17E16E04-21BC-4790-9C79-B39BDD72E9FA}"/>
+                <a16:creationId xmlns:a16="http://schemas.microsoft.com/office/drawing/2014/main" id="{DA8640C0-9771-4C18-872B-3CB9A1F163FE}"/>
               </a:ext>
             </a:extLst>
           </p:cNvPr>
@@ -9959,7 +11314,7 @@
           <p:cNvPr id="6" name="">
             <a:extLst xmlns:a="http://schemas.openxmlformats.org/drawingml/2006/main">
               <a:ext uri="{FF2B5EF4-FFF2-40B4-BE49-F238E27FC236}">
-                <a16:creationId xmlns:a16="http://schemas.microsoft.com/office/drawing/2014/main" id="{3C4A68D3-68FA-43A9-A2FB-96065B2410AE}"/>
+                <a16:creationId xmlns:a16="http://schemas.microsoft.com/office/drawing/2014/main" id="{27DDA269-AA80-4209-B09E-9F9A6517457F}"/>
               </a:ext>
             </a:extLst>
           </p:cNvPr>
@@ -10015,7 +11370,7 @@
           <p:cNvPr id="7" name="">
             <a:extLst xmlns:a="http://schemas.openxmlformats.org/drawingml/2006/main">
               <a:ext uri="{FF2B5EF4-FFF2-40B4-BE49-F238E27FC236}">
-                <a16:creationId xmlns:a16="http://schemas.microsoft.com/office/drawing/2014/main" id="{52BD875B-865A-4254-A387-56742937CA44}"/>
+                <a16:creationId xmlns:a16="http://schemas.microsoft.com/office/drawing/2014/main" id="{54FCFE9E-F574-4633-9362-32F34EFC6790}"/>
               </a:ext>
             </a:extLst>
           </p:cNvPr>
@@ -10071,7 +11426,7 @@
           <p:cNvPr id="8" name="">
             <a:extLst xmlns:a="http://schemas.openxmlformats.org/drawingml/2006/main">
               <a:ext uri="{FF2B5EF4-FFF2-40B4-BE49-F238E27FC236}">
-                <a16:creationId xmlns:a16="http://schemas.microsoft.com/office/drawing/2014/main" id="{E9502926-8369-48FD-BB4E-E8D3D6E28559}"/>
+                <a16:creationId xmlns:a16="http://schemas.microsoft.com/office/drawing/2014/main" id="{5D4487CB-3E0F-44BF-A1C7-901BDF4B37D6}"/>
               </a:ext>
             </a:extLst>
           </p:cNvPr>
@@ -10106,7 +11461,7 @@
           <p:cNvPr id="9" name="">
             <a:extLst xmlns:a="http://schemas.openxmlformats.org/drawingml/2006/main">
               <a:ext uri="{FF2B5EF4-FFF2-40B4-BE49-F238E27FC236}">
-                <a16:creationId xmlns:a16="http://schemas.microsoft.com/office/drawing/2014/main" id="{4C7D2B26-4D8B-4084-9736-F1AAD8315C1C}"/>
+                <a16:creationId xmlns:a16="http://schemas.microsoft.com/office/drawing/2014/main" id="{4353AE93-F188-4E94-9031-E38471ED30C3}"/>
               </a:ext>
             </a:extLst>
           </p:cNvPr>
@@ -10139,7 +11494,7 @@
           <p:cNvPr id="10" name="">
             <a:extLst xmlns:a="http://schemas.openxmlformats.org/drawingml/2006/main">
               <a:ext uri="{FF2B5EF4-FFF2-40B4-BE49-F238E27FC236}">
-                <a16:creationId xmlns:a16="http://schemas.microsoft.com/office/drawing/2014/main" id="{284643F6-7F57-44E5-8406-129D082D0E69}"/>
+                <a16:creationId xmlns:a16="http://schemas.microsoft.com/office/drawing/2014/main" id="{4BB1EC78-C866-43F9-86FB-10B6E16F37C2}"/>
               </a:ext>
             </a:extLst>
           </p:cNvPr>
@@ -10195,7 +11550,7 @@
           <p:cNvPr id="11" name="">
             <a:extLst xmlns:a="http://schemas.openxmlformats.org/drawingml/2006/main">
               <a:ext uri="{FF2B5EF4-FFF2-40B4-BE49-F238E27FC236}">
-                <a16:creationId xmlns:a16="http://schemas.microsoft.com/office/drawing/2014/main" id="{A71A2687-2D7D-440F-8E18-44B127AB37B2}"/>
+                <a16:creationId xmlns:a16="http://schemas.microsoft.com/office/drawing/2014/main" id="{A9A8BBE7-3F30-41F4-9FE0-F464114F3EF1}"/>
               </a:ext>
             </a:extLst>
           </p:cNvPr>
@@ -10251,7 +11606,7 @@
           <p:cNvPr id="12" name="">
             <a:extLst xmlns:a="http://schemas.openxmlformats.org/drawingml/2006/main">
               <a:ext uri="{FF2B5EF4-FFF2-40B4-BE49-F238E27FC236}">
-                <a16:creationId xmlns:a16="http://schemas.microsoft.com/office/drawing/2014/main" id="{C600F0A8-5B25-4347-986D-D2C8694C7D94}"/>
+                <a16:creationId xmlns:a16="http://schemas.microsoft.com/office/drawing/2014/main" id="{C43C3A69-02EC-4CA8-819E-8244780A43F9}"/>
               </a:ext>
             </a:extLst>
           </p:cNvPr>
@@ -10286,7 +11641,7 @@
           <p:cNvPr id="13" name="">
             <a:extLst xmlns:a="http://schemas.openxmlformats.org/drawingml/2006/main">
               <a:ext uri="{FF2B5EF4-FFF2-40B4-BE49-F238E27FC236}">
-                <a16:creationId xmlns:a16="http://schemas.microsoft.com/office/drawing/2014/main" id="{C828FD3D-2F8C-4B29-95A8-71C21A48B5F0}"/>
+                <a16:creationId xmlns:a16="http://schemas.microsoft.com/office/drawing/2014/main" id="{F3324C8D-CDE1-49DC-AE23-51C8068F8E0A}"/>
               </a:ext>
             </a:extLst>
           </p:cNvPr>
@@ -10319,7 +11674,7 @@
           <p:cNvPr id="14" name="">
             <a:extLst xmlns:a="http://schemas.openxmlformats.org/drawingml/2006/main">
               <a:ext uri="{FF2B5EF4-FFF2-40B4-BE49-F238E27FC236}">
-                <a16:creationId xmlns:a16="http://schemas.microsoft.com/office/drawing/2014/main" id="{7EC0DA3A-6A68-42CA-9767-3CCC0B17FF4A}"/>
+                <a16:creationId xmlns:a16="http://schemas.microsoft.com/office/drawing/2014/main" id="{CF9CF4F7-C7B0-4AE7-93BF-76DF84A5245F}"/>
               </a:ext>
             </a:extLst>
           </p:cNvPr>
@@ -10375,7 +11730,7 @@
           <p:cNvPr id="15" name="">
             <a:extLst xmlns:a="http://schemas.openxmlformats.org/drawingml/2006/main">
               <a:ext uri="{FF2B5EF4-FFF2-40B4-BE49-F238E27FC236}">
-                <a16:creationId xmlns:a16="http://schemas.microsoft.com/office/drawing/2014/main" id="{0386FC90-CD46-44DD-97C6-2CDA420927B5}"/>
+                <a16:creationId xmlns:a16="http://schemas.microsoft.com/office/drawing/2014/main" id="{293E6823-91E4-4E35-AB7F-3D9E5E780B20}"/>
               </a:ext>
             </a:extLst>
           </p:cNvPr>
@@ -10431,7 +11786,7 @@
           <p:cNvPr id="16" name="">
             <a:extLst xmlns:a="http://schemas.openxmlformats.org/drawingml/2006/main">
               <a:ext uri="{FF2B5EF4-FFF2-40B4-BE49-F238E27FC236}">
-                <a16:creationId xmlns:a16="http://schemas.microsoft.com/office/drawing/2014/main" id="{C5072CE6-1ED6-4446-AED6-8490593D9426}"/>
+                <a16:creationId xmlns:a16="http://schemas.microsoft.com/office/drawing/2014/main" id="{69D087B7-6646-4BE0-B2FA-36BEB784A9C6}"/>
               </a:ext>
             </a:extLst>
           </p:cNvPr>
@@ -10487,7 +11842,7 @@
           <p:cNvPr id="17" name="">
             <a:extLst xmlns:a="http://schemas.openxmlformats.org/drawingml/2006/main">
               <a:ext uri="{FF2B5EF4-FFF2-40B4-BE49-F238E27FC236}">
-                <a16:creationId xmlns:a16="http://schemas.microsoft.com/office/drawing/2014/main" id="{9FCCBEF5-C94D-4B77-9593-45B5AD55B856}"/>
+                <a16:creationId xmlns:a16="http://schemas.microsoft.com/office/drawing/2014/main" id="{E29FD687-31DA-4FE0-8899-5D9C74C4EE4D}"/>
               </a:ext>
             </a:extLst>
           </p:cNvPr>
@@ -10543,7 +11898,7 @@
           <p:cNvPr id="18" name="">
             <a:extLst xmlns:a="http://schemas.openxmlformats.org/drawingml/2006/main">
               <a:ext uri="{FF2B5EF4-FFF2-40B4-BE49-F238E27FC236}">
-                <a16:creationId xmlns:a16="http://schemas.microsoft.com/office/drawing/2014/main" id="{0D84411D-1F41-4352-947F-E3F374513DB0}"/>
+                <a16:creationId xmlns:a16="http://schemas.microsoft.com/office/drawing/2014/main" id="{549F156F-DC95-4F86-883C-D7DB7386AC4E}"/>
               </a:ext>
             </a:extLst>
           </p:cNvPr>
@@ -10597,7 +11952,7 @@
     </p:spTree>
     <p:extLst>
       <p:ext uri="{BB962C8B-B14F-4D97-AF65-F5344CB8AC3E}">
-        <p14:creationId xmlns:p14="http://schemas.microsoft.com/office/powerpoint/2010/main" val="1629257206"/>
+        <p14:creationId xmlns:p14="http://schemas.microsoft.com/office/powerpoint/2010/main" val="520274152"/>
       </p:ext>
     </p:extLst>
   </p:cSld>
